--- a/Software Architecture.pptx
+++ b/Software Architecture.pptx
@@ -2,7 +2,7 @@
 <file path=ppt/presentation.xml><?xml version="1.0" encoding="utf-8"?>
 <p:presentation xmlns:a="http://schemas.openxmlformats.org/drawingml/2006/main" xmlns:r="http://schemas.openxmlformats.org/officeDocument/2006/relationships" xmlns:p="http://schemas.openxmlformats.org/presentationml/2006/main" saveSubsetFonts="1" autoCompressPictures="0">
   <p:sldMasterIdLst>
-    <p:sldMasterId id="2147483676" r:id="rId1"/>
+    <p:sldMasterId id="2147483702" r:id="rId1"/>
   </p:sldMasterIdLst>
   <p:notesMasterIdLst>
     <p:notesMasterId r:id="rId3"/>
@@ -10,7 +10,7 @@
   <p:sldIdLst>
     <p:sldId id="256" r:id="rId2"/>
   </p:sldIdLst>
-  <p:sldSz cx="12599988" cy="10799763"/>
+  <p:sldSz cx="28800425" cy="10799763"/>
   <p:notesSz cx="5143500" cy="9144000"/>
   <p:defaultTextStyle>
     <a:defPPr>
@@ -353,15 +353,15 @@
         </p:nvSpPr>
         <p:spPr>
           <a:xfrm>
-            <a:off x="944999" y="1767462"/>
-            <a:ext cx="10709990" cy="3759917"/>
+            <a:off x="3600054" y="1767462"/>
+            <a:ext cx="21600319" cy="3759917"/>
           </a:xfrm>
         </p:spPr>
         <p:txBody>
           <a:bodyPr anchor="b"/>
           <a:lstStyle>
             <a:lvl1pPr algn="ctr">
-              <a:defRPr sz="8268"/>
+              <a:defRPr sz="9450"/>
             </a:lvl1pPr>
           </a:lstStyle>
           <a:p>
@@ -385,8 +385,8 @@
         </p:nvSpPr>
         <p:spPr>
           <a:xfrm>
-            <a:off x="1574999" y="5672376"/>
-            <a:ext cx="9449991" cy="2607442"/>
+            <a:off x="3600054" y="5672376"/>
+            <a:ext cx="21600319" cy="2607442"/>
           </a:xfrm>
         </p:spPr>
         <p:txBody>
@@ -394,39 +394,39 @@
           <a:lstStyle>
             <a:lvl1pPr marL="0" indent="0" algn="ctr">
               <a:buNone/>
-              <a:defRPr sz="3307"/>
+              <a:defRPr sz="3780"/>
             </a:lvl1pPr>
-            <a:lvl2pPr marL="630022" indent="0" algn="ctr">
+            <a:lvl2pPr marL="720000" indent="0" algn="ctr">
               <a:buNone/>
-              <a:defRPr sz="2756"/>
+              <a:defRPr sz="3150"/>
             </a:lvl2pPr>
-            <a:lvl3pPr marL="1260043" indent="0" algn="ctr">
+            <a:lvl3pPr marL="1439998" indent="0" algn="ctr">
               <a:buNone/>
-              <a:defRPr sz="2480"/>
+              <a:defRPr sz="2836"/>
             </a:lvl3pPr>
-            <a:lvl4pPr marL="1890065" indent="0" algn="ctr">
+            <a:lvl4pPr marL="2159996" indent="0" algn="ctr">
               <a:buNone/>
-              <a:defRPr sz="2205"/>
+              <a:defRPr sz="2520"/>
             </a:lvl4pPr>
-            <a:lvl5pPr marL="2520086" indent="0" algn="ctr">
+            <a:lvl5pPr marL="2879994" indent="0" algn="ctr">
               <a:buNone/>
-              <a:defRPr sz="2205"/>
+              <a:defRPr sz="2520"/>
             </a:lvl5pPr>
-            <a:lvl6pPr marL="3150108" indent="0" algn="ctr">
+            <a:lvl6pPr marL="3599994" indent="0" algn="ctr">
               <a:buNone/>
-              <a:defRPr sz="2205"/>
+              <a:defRPr sz="2520"/>
             </a:lvl6pPr>
-            <a:lvl7pPr marL="3780130" indent="0" algn="ctr">
+            <a:lvl7pPr marL="4319992" indent="0" algn="ctr">
               <a:buNone/>
-              <a:defRPr sz="2205"/>
+              <a:defRPr sz="2520"/>
             </a:lvl7pPr>
-            <a:lvl8pPr marL="4410151" indent="0" algn="ctr">
+            <a:lvl8pPr marL="5039990" indent="0" algn="ctr">
               <a:buNone/>
-              <a:defRPr sz="2205"/>
+              <a:defRPr sz="2520"/>
             </a:lvl8pPr>
-            <a:lvl9pPr marL="5040173" indent="0" algn="ctr">
+            <a:lvl9pPr marL="5759988" indent="0" algn="ctr">
               <a:buNone/>
-              <a:defRPr sz="2205"/>
+              <a:defRPr sz="2520"/>
             </a:lvl9pPr>
           </a:lstStyle>
           <a:p>
@@ -506,7 +506,7 @@
     </p:spTree>
     <p:extLst>
       <p:ext uri="{BB962C8B-B14F-4D97-AF65-F5344CB8AC3E}">
-        <p14:creationId xmlns:p14="http://schemas.microsoft.com/office/powerpoint/2010/main" val="874071170"/>
+        <p14:creationId xmlns:p14="http://schemas.microsoft.com/office/powerpoint/2010/main" val="232015293"/>
       </p:ext>
     </p:extLst>
   </p:cSld>
@@ -677,7 +677,7 @@
     </p:spTree>
     <p:extLst>
       <p:ext uri="{BB962C8B-B14F-4D97-AF65-F5344CB8AC3E}">
-        <p14:creationId xmlns:p14="http://schemas.microsoft.com/office/powerpoint/2010/main" val="3314692970"/>
+        <p14:creationId xmlns:p14="http://schemas.microsoft.com/office/powerpoint/2010/main" val="3499957493"/>
       </p:ext>
     </p:extLst>
   </p:cSld>
@@ -717,8 +717,8 @@
         </p:nvSpPr>
         <p:spPr>
           <a:xfrm>
-            <a:off x="9016867" y="574987"/>
-            <a:ext cx="2716872" cy="9152300"/>
+            <a:off x="20610303" y="574987"/>
+            <a:ext cx="6210092" cy="9152300"/>
           </a:xfrm>
         </p:spPr>
         <p:txBody>
@@ -745,8 +745,8 @@
         </p:nvSpPr>
         <p:spPr>
           <a:xfrm>
-            <a:off x="866250" y="574987"/>
-            <a:ext cx="7993117" cy="9152300"/>
+            <a:off x="1980031" y="574987"/>
+            <a:ext cx="18270269" cy="9152300"/>
           </a:xfrm>
         </p:spPr>
         <p:txBody>
@@ -858,7 +858,7 @@
     </p:spTree>
     <p:extLst>
       <p:ext uri="{BB962C8B-B14F-4D97-AF65-F5344CB8AC3E}">
-        <p14:creationId xmlns:p14="http://schemas.microsoft.com/office/powerpoint/2010/main" val="2788261109"/>
+        <p14:creationId xmlns:p14="http://schemas.microsoft.com/office/powerpoint/2010/main" val="1122724443"/>
       </p:ext>
     </p:extLst>
   </p:cSld>
@@ -894,7 +894,7 @@
     </p:spTree>
     <p:extLst>
       <p:ext uri="{BB962C8B-B14F-4D97-AF65-F5344CB8AC3E}">
-        <p14:creationId xmlns:p14="http://schemas.microsoft.com/office/powerpoint/2010/main" val="325887725"/>
+        <p14:creationId xmlns:p14="http://schemas.microsoft.com/office/powerpoint/2010/main" val="3535459957"/>
       </p:ext>
     </p:extLst>
   </p:cSld>
@@ -1064,7 +1064,7 @@
     </p:spTree>
     <p:extLst>
       <p:ext uri="{BB962C8B-B14F-4D97-AF65-F5344CB8AC3E}">
-        <p14:creationId xmlns:p14="http://schemas.microsoft.com/office/powerpoint/2010/main" val="116863782"/>
+        <p14:creationId xmlns:p14="http://schemas.microsoft.com/office/powerpoint/2010/main" val="2504656996"/>
       </p:ext>
     </p:extLst>
   </p:cSld>
@@ -1104,15 +1104,15 @@
         </p:nvSpPr>
         <p:spPr>
           <a:xfrm>
-            <a:off x="859687" y="2692444"/>
-            <a:ext cx="10867490" cy="4492401"/>
+            <a:off x="1965030" y="2692444"/>
+            <a:ext cx="24840367" cy="4492401"/>
           </a:xfrm>
         </p:spPr>
         <p:txBody>
           <a:bodyPr anchor="b"/>
           <a:lstStyle>
             <a:lvl1pPr>
-              <a:defRPr sz="8268"/>
+              <a:defRPr sz="9450"/>
             </a:lvl1pPr>
           </a:lstStyle>
           <a:p>
@@ -1136,8 +1136,8 @@
         </p:nvSpPr>
         <p:spPr>
           <a:xfrm>
-            <a:off x="859687" y="7227345"/>
-            <a:ext cx="10867490" cy="2362447"/>
+            <a:off x="1965030" y="7227345"/>
+            <a:ext cx="24840367" cy="2362447"/>
           </a:xfrm>
         </p:spPr>
         <p:txBody>
@@ -1145,15 +1145,17 @@
           <a:lstStyle>
             <a:lvl1pPr marL="0" indent="0">
               <a:buNone/>
-              <a:defRPr sz="3307">
+              <a:defRPr sz="3780">
                 <a:solidFill>
-                  <a:schemeClr val="tx1"/>
+                  <a:schemeClr val="tx1">
+                    <a:tint val="75000"/>
+                  </a:schemeClr>
                 </a:solidFill>
               </a:defRPr>
             </a:lvl1pPr>
-            <a:lvl2pPr marL="630022" indent="0">
+            <a:lvl2pPr marL="720000" indent="0">
               <a:buNone/>
-              <a:defRPr sz="2756">
+              <a:defRPr sz="3150">
                 <a:solidFill>
                   <a:schemeClr val="tx1">
                     <a:tint val="75000"/>
@@ -1161,9 +1163,9 @@
                 </a:solidFill>
               </a:defRPr>
             </a:lvl2pPr>
-            <a:lvl3pPr marL="1260043" indent="0">
+            <a:lvl3pPr marL="1439998" indent="0">
               <a:buNone/>
-              <a:defRPr sz="2480">
+              <a:defRPr sz="2836">
                 <a:solidFill>
                   <a:schemeClr val="tx1">
                     <a:tint val="75000"/>
@@ -1171,9 +1173,9 @@
                 </a:solidFill>
               </a:defRPr>
             </a:lvl3pPr>
-            <a:lvl4pPr marL="1890065" indent="0">
+            <a:lvl4pPr marL="2159996" indent="0">
               <a:buNone/>
-              <a:defRPr sz="2205">
+              <a:defRPr sz="2520">
                 <a:solidFill>
                   <a:schemeClr val="tx1">
                     <a:tint val="75000"/>
@@ -1181,9 +1183,9 @@
                 </a:solidFill>
               </a:defRPr>
             </a:lvl4pPr>
-            <a:lvl5pPr marL="2520086" indent="0">
+            <a:lvl5pPr marL="2879994" indent="0">
               <a:buNone/>
-              <a:defRPr sz="2205">
+              <a:defRPr sz="2520">
                 <a:solidFill>
                   <a:schemeClr val="tx1">
                     <a:tint val="75000"/>
@@ -1191,9 +1193,9 @@
                 </a:solidFill>
               </a:defRPr>
             </a:lvl5pPr>
-            <a:lvl6pPr marL="3150108" indent="0">
+            <a:lvl6pPr marL="3599994" indent="0">
               <a:buNone/>
-              <a:defRPr sz="2205">
+              <a:defRPr sz="2520">
                 <a:solidFill>
                   <a:schemeClr val="tx1">
                     <a:tint val="75000"/>
@@ -1201,9 +1203,9 @@
                 </a:solidFill>
               </a:defRPr>
             </a:lvl6pPr>
-            <a:lvl7pPr marL="3780130" indent="0">
+            <a:lvl7pPr marL="4319992" indent="0">
               <a:buNone/>
-              <a:defRPr sz="2205">
+              <a:defRPr sz="2520">
                 <a:solidFill>
                   <a:schemeClr val="tx1">
                     <a:tint val="75000"/>
@@ -1211,9 +1213,9 @@
                 </a:solidFill>
               </a:defRPr>
             </a:lvl7pPr>
-            <a:lvl8pPr marL="4410151" indent="0">
+            <a:lvl8pPr marL="5039990" indent="0">
               <a:buNone/>
-              <a:defRPr sz="2205">
+              <a:defRPr sz="2520">
                 <a:solidFill>
                   <a:schemeClr val="tx1">
                     <a:tint val="75000"/>
@@ -1221,9 +1223,9 @@
                 </a:solidFill>
               </a:defRPr>
             </a:lvl8pPr>
-            <a:lvl9pPr marL="5040173" indent="0">
+            <a:lvl9pPr marL="5759988" indent="0">
               <a:buNone/>
-              <a:defRPr sz="2205">
+              <a:defRPr sz="2520">
                 <a:solidFill>
                   <a:schemeClr val="tx1">
                     <a:tint val="75000"/>
@@ -1309,7 +1311,7 @@
     </p:spTree>
     <p:extLst>
       <p:ext uri="{BB962C8B-B14F-4D97-AF65-F5344CB8AC3E}">
-        <p14:creationId xmlns:p14="http://schemas.microsoft.com/office/powerpoint/2010/main" val="133715505"/>
+        <p14:creationId xmlns:p14="http://schemas.microsoft.com/office/powerpoint/2010/main" val="786951484"/>
       </p:ext>
     </p:extLst>
   </p:cSld>
@@ -1372,8 +1374,8 @@
         </p:nvSpPr>
         <p:spPr>
           <a:xfrm>
-            <a:off x="866249" y="2874937"/>
-            <a:ext cx="5354995" cy="6852350"/>
+            <a:off x="1980031" y="2874937"/>
+            <a:ext cx="12240182" cy="6852350"/>
           </a:xfrm>
         </p:spPr>
         <p:txBody>
@@ -1429,8 +1431,8 @@
         </p:nvSpPr>
         <p:spPr>
           <a:xfrm>
-            <a:off x="6378744" y="2874937"/>
-            <a:ext cx="5354995" cy="6852350"/>
+            <a:off x="14580216" y="2874937"/>
+            <a:ext cx="12240182" cy="6852350"/>
           </a:xfrm>
         </p:spPr>
         <p:txBody>
@@ -1542,7 +1544,7 @@
     </p:spTree>
     <p:extLst>
       <p:ext uri="{BB962C8B-B14F-4D97-AF65-F5344CB8AC3E}">
-        <p14:creationId xmlns:p14="http://schemas.microsoft.com/office/powerpoint/2010/main" val="3381862736"/>
+        <p14:creationId xmlns:p14="http://schemas.microsoft.com/office/powerpoint/2010/main" val="278020495"/>
       </p:ext>
     </p:extLst>
   </p:cSld>
@@ -1582,8 +1584,8 @@
         </p:nvSpPr>
         <p:spPr>
           <a:xfrm>
-            <a:off x="867890" y="574990"/>
-            <a:ext cx="10867490" cy="2087455"/>
+            <a:off x="1983780" y="574990"/>
+            <a:ext cx="24840367" cy="2087455"/>
           </a:xfrm>
         </p:spPr>
         <p:txBody>
@@ -1610,8 +1612,8 @@
         </p:nvSpPr>
         <p:spPr>
           <a:xfrm>
-            <a:off x="867892" y="2647443"/>
-            <a:ext cx="5330385" cy="1297471"/>
+            <a:off x="1983783" y="2647445"/>
+            <a:ext cx="12183930" cy="1297471"/>
           </a:xfrm>
         </p:spPr>
         <p:txBody>
@@ -1619,39 +1621,39 @@
           <a:lstStyle>
             <a:lvl1pPr marL="0" indent="0">
               <a:buNone/>
-              <a:defRPr sz="3307" b="1"/>
+              <a:defRPr sz="3780" b="1"/>
             </a:lvl1pPr>
-            <a:lvl2pPr marL="630022" indent="0">
+            <a:lvl2pPr marL="720000" indent="0">
               <a:buNone/>
-              <a:defRPr sz="2756" b="1"/>
+              <a:defRPr sz="3150" b="1"/>
             </a:lvl2pPr>
-            <a:lvl3pPr marL="1260043" indent="0">
+            <a:lvl3pPr marL="1439998" indent="0">
               <a:buNone/>
-              <a:defRPr sz="2480" b="1"/>
+              <a:defRPr sz="2836" b="1"/>
             </a:lvl3pPr>
-            <a:lvl4pPr marL="1890065" indent="0">
+            <a:lvl4pPr marL="2159996" indent="0">
               <a:buNone/>
-              <a:defRPr sz="2205" b="1"/>
+              <a:defRPr sz="2520" b="1"/>
             </a:lvl4pPr>
-            <a:lvl5pPr marL="2520086" indent="0">
+            <a:lvl5pPr marL="2879994" indent="0">
               <a:buNone/>
-              <a:defRPr sz="2205" b="1"/>
+              <a:defRPr sz="2520" b="1"/>
             </a:lvl5pPr>
-            <a:lvl6pPr marL="3150108" indent="0">
+            <a:lvl6pPr marL="3599994" indent="0">
               <a:buNone/>
-              <a:defRPr sz="2205" b="1"/>
+              <a:defRPr sz="2520" b="1"/>
             </a:lvl6pPr>
-            <a:lvl7pPr marL="3780130" indent="0">
+            <a:lvl7pPr marL="4319992" indent="0">
               <a:buNone/>
-              <a:defRPr sz="2205" b="1"/>
+              <a:defRPr sz="2520" b="1"/>
             </a:lvl7pPr>
-            <a:lvl8pPr marL="4410151" indent="0">
+            <a:lvl8pPr marL="5039990" indent="0">
               <a:buNone/>
-              <a:defRPr sz="2205" b="1"/>
+              <a:defRPr sz="2520" b="1"/>
             </a:lvl8pPr>
-            <a:lvl9pPr marL="5040173" indent="0">
+            <a:lvl9pPr marL="5759988" indent="0">
               <a:buNone/>
-              <a:defRPr sz="2205" b="1"/>
+              <a:defRPr sz="2520" b="1"/>
             </a:lvl9pPr>
           </a:lstStyle>
           <a:p>
@@ -1675,8 +1677,8 @@
         </p:nvSpPr>
         <p:spPr>
           <a:xfrm>
-            <a:off x="867892" y="3944914"/>
-            <a:ext cx="5330385" cy="5802373"/>
+            <a:off x="1983783" y="3944916"/>
+            <a:ext cx="12183930" cy="5802373"/>
           </a:xfrm>
         </p:spPr>
         <p:txBody>
@@ -1732,8 +1734,8 @@
         </p:nvSpPr>
         <p:spPr>
           <a:xfrm>
-            <a:off x="6378745" y="2647443"/>
-            <a:ext cx="5356636" cy="1297471"/>
+            <a:off x="14580215" y="2647445"/>
+            <a:ext cx="12243932" cy="1297471"/>
           </a:xfrm>
         </p:spPr>
         <p:txBody>
@@ -1741,39 +1743,39 @@
           <a:lstStyle>
             <a:lvl1pPr marL="0" indent="0">
               <a:buNone/>
-              <a:defRPr sz="3307" b="1"/>
+              <a:defRPr sz="3780" b="1"/>
             </a:lvl1pPr>
-            <a:lvl2pPr marL="630022" indent="0">
+            <a:lvl2pPr marL="720000" indent="0">
               <a:buNone/>
-              <a:defRPr sz="2756" b="1"/>
+              <a:defRPr sz="3150" b="1"/>
             </a:lvl2pPr>
-            <a:lvl3pPr marL="1260043" indent="0">
+            <a:lvl3pPr marL="1439998" indent="0">
               <a:buNone/>
-              <a:defRPr sz="2480" b="1"/>
+              <a:defRPr sz="2836" b="1"/>
             </a:lvl3pPr>
-            <a:lvl4pPr marL="1890065" indent="0">
+            <a:lvl4pPr marL="2159996" indent="0">
               <a:buNone/>
-              <a:defRPr sz="2205" b="1"/>
+              <a:defRPr sz="2520" b="1"/>
             </a:lvl4pPr>
-            <a:lvl5pPr marL="2520086" indent="0">
+            <a:lvl5pPr marL="2879994" indent="0">
               <a:buNone/>
-              <a:defRPr sz="2205" b="1"/>
+              <a:defRPr sz="2520" b="1"/>
             </a:lvl5pPr>
-            <a:lvl6pPr marL="3150108" indent="0">
+            <a:lvl6pPr marL="3599994" indent="0">
               <a:buNone/>
-              <a:defRPr sz="2205" b="1"/>
+              <a:defRPr sz="2520" b="1"/>
             </a:lvl6pPr>
-            <a:lvl7pPr marL="3780130" indent="0">
+            <a:lvl7pPr marL="4319992" indent="0">
               <a:buNone/>
-              <a:defRPr sz="2205" b="1"/>
+              <a:defRPr sz="2520" b="1"/>
             </a:lvl7pPr>
-            <a:lvl8pPr marL="4410151" indent="0">
+            <a:lvl8pPr marL="5039990" indent="0">
               <a:buNone/>
-              <a:defRPr sz="2205" b="1"/>
+              <a:defRPr sz="2520" b="1"/>
             </a:lvl8pPr>
-            <a:lvl9pPr marL="5040173" indent="0">
+            <a:lvl9pPr marL="5759988" indent="0">
               <a:buNone/>
-              <a:defRPr sz="2205" b="1"/>
+              <a:defRPr sz="2520" b="1"/>
             </a:lvl9pPr>
           </a:lstStyle>
           <a:p>
@@ -1797,8 +1799,8 @@
         </p:nvSpPr>
         <p:spPr>
           <a:xfrm>
-            <a:off x="6378745" y="3944914"/>
-            <a:ext cx="5356636" cy="5802373"/>
+            <a:off x="14580215" y="3944916"/>
+            <a:ext cx="12243932" cy="5802373"/>
           </a:xfrm>
         </p:spPr>
         <p:txBody>
@@ -1910,7 +1912,7 @@
     </p:spTree>
     <p:extLst>
       <p:ext uri="{BB962C8B-B14F-4D97-AF65-F5344CB8AC3E}">
-        <p14:creationId xmlns:p14="http://schemas.microsoft.com/office/powerpoint/2010/main" val="4007485958"/>
+        <p14:creationId xmlns:p14="http://schemas.microsoft.com/office/powerpoint/2010/main" val="2993295716"/>
       </p:ext>
     </p:extLst>
   </p:cSld>
@@ -2029,7 +2031,7 @@
     </p:spTree>
     <p:extLst>
       <p:ext uri="{BB962C8B-B14F-4D97-AF65-F5344CB8AC3E}">
-        <p14:creationId xmlns:p14="http://schemas.microsoft.com/office/powerpoint/2010/main" val="2555134291"/>
+        <p14:creationId xmlns:p14="http://schemas.microsoft.com/office/powerpoint/2010/main" val="3707421864"/>
       </p:ext>
     </p:extLst>
   </p:cSld>
@@ -2125,7 +2127,7 @@
     </p:spTree>
     <p:extLst>
       <p:ext uri="{BB962C8B-B14F-4D97-AF65-F5344CB8AC3E}">
-        <p14:creationId xmlns:p14="http://schemas.microsoft.com/office/powerpoint/2010/main" val="1602290045"/>
+        <p14:creationId xmlns:p14="http://schemas.microsoft.com/office/powerpoint/2010/main" val="2830616349"/>
       </p:ext>
     </p:extLst>
   </p:cSld>
@@ -2165,15 +2167,15 @@
         </p:nvSpPr>
         <p:spPr>
           <a:xfrm>
-            <a:off x="867890" y="719984"/>
-            <a:ext cx="4063824" cy="2519945"/>
+            <a:off x="1983783" y="719986"/>
+            <a:ext cx="9288886" cy="2519945"/>
           </a:xfrm>
         </p:spPr>
         <p:txBody>
           <a:bodyPr anchor="b"/>
           <a:lstStyle>
             <a:lvl1pPr>
-              <a:defRPr sz="4410"/>
+              <a:defRPr sz="5040"/>
             </a:lvl1pPr>
           </a:lstStyle>
           <a:p>
@@ -2197,39 +2199,39 @@
         </p:nvSpPr>
         <p:spPr>
           <a:xfrm>
-            <a:off x="5356636" y="1554968"/>
-            <a:ext cx="6378744" cy="7674832"/>
+            <a:off x="12243932" y="1554966"/>
+            <a:ext cx="14580215" cy="7674832"/>
           </a:xfrm>
         </p:spPr>
         <p:txBody>
           <a:bodyPr/>
           <a:lstStyle>
             <a:lvl1pPr>
-              <a:defRPr sz="4410"/>
+              <a:defRPr sz="5040"/>
             </a:lvl1pPr>
             <a:lvl2pPr>
-              <a:defRPr sz="3858"/>
+              <a:defRPr sz="4410"/>
             </a:lvl2pPr>
             <a:lvl3pPr>
-              <a:defRPr sz="3307"/>
+              <a:defRPr sz="3780"/>
             </a:lvl3pPr>
             <a:lvl4pPr>
-              <a:defRPr sz="2756"/>
+              <a:defRPr sz="3150"/>
             </a:lvl4pPr>
             <a:lvl5pPr>
-              <a:defRPr sz="2756"/>
+              <a:defRPr sz="3150"/>
             </a:lvl5pPr>
             <a:lvl6pPr>
-              <a:defRPr sz="2756"/>
+              <a:defRPr sz="3150"/>
             </a:lvl6pPr>
             <a:lvl7pPr>
-              <a:defRPr sz="2756"/>
+              <a:defRPr sz="3150"/>
             </a:lvl7pPr>
             <a:lvl8pPr>
-              <a:defRPr sz="2756"/>
+              <a:defRPr sz="3150"/>
             </a:lvl8pPr>
             <a:lvl9pPr>
-              <a:defRPr sz="2756"/>
+              <a:defRPr sz="3150"/>
             </a:lvl9pPr>
           </a:lstStyle>
           <a:p>
@@ -2282,8 +2284,8 @@
         </p:nvSpPr>
         <p:spPr>
           <a:xfrm>
-            <a:off x="867890" y="3239929"/>
-            <a:ext cx="4063824" cy="6002369"/>
+            <a:off x="1983783" y="3239931"/>
+            <a:ext cx="9288886" cy="6002369"/>
           </a:xfrm>
         </p:spPr>
         <p:txBody>
@@ -2291,39 +2293,39 @@
           <a:lstStyle>
             <a:lvl1pPr marL="0" indent="0">
               <a:buNone/>
-              <a:defRPr sz="2205"/>
+              <a:defRPr sz="2520"/>
             </a:lvl1pPr>
-            <a:lvl2pPr marL="630022" indent="0">
+            <a:lvl2pPr marL="720000" indent="0">
               <a:buNone/>
-              <a:defRPr sz="1929"/>
+              <a:defRPr sz="2206"/>
             </a:lvl2pPr>
-            <a:lvl3pPr marL="1260043" indent="0">
+            <a:lvl3pPr marL="1439998" indent="0">
               <a:buNone/>
-              <a:defRPr sz="1654"/>
+              <a:defRPr sz="1890"/>
             </a:lvl3pPr>
-            <a:lvl4pPr marL="1890065" indent="0">
+            <a:lvl4pPr marL="2159996" indent="0">
               <a:buNone/>
-              <a:defRPr sz="1378"/>
+              <a:defRPr sz="1576"/>
             </a:lvl4pPr>
-            <a:lvl5pPr marL="2520086" indent="0">
+            <a:lvl5pPr marL="2879994" indent="0">
               <a:buNone/>
-              <a:defRPr sz="1378"/>
+              <a:defRPr sz="1576"/>
             </a:lvl5pPr>
-            <a:lvl6pPr marL="3150108" indent="0">
+            <a:lvl6pPr marL="3599994" indent="0">
               <a:buNone/>
-              <a:defRPr sz="1378"/>
+              <a:defRPr sz="1576"/>
             </a:lvl6pPr>
-            <a:lvl7pPr marL="3780130" indent="0">
+            <a:lvl7pPr marL="4319992" indent="0">
               <a:buNone/>
-              <a:defRPr sz="1378"/>
+              <a:defRPr sz="1576"/>
             </a:lvl7pPr>
-            <a:lvl8pPr marL="4410151" indent="0">
+            <a:lvl8pPr marL="5039990" indent="0">
               <a:buNone/>
-              <a:defRPr sz="1378"/>
+              <a:defRPr sz="1576"/>
             </a:lvl8pPr>
-            <a:lvl9pPr marL="5040173" indent="0">
+            <a:lvl9pPr marL="5759988" indent="0">
               <a:buNone/>
-              <a:defRPr sz="1378"/>
+              <a:defRPr sz="1576"/>
             </a:lvl9pPr>
           </a:lstStyle>
           <a:p>
@@ -2403,7 +2405,7 @@
     </p:spTree>
     <p:extLst>
       <p:ext uri="{BB962C8B-B14F-4D97-AF65-F5344CB8AC3E}">
-        <p14:creationId xmlns:p14="http://schemas.microsoft.com/office/powerpoint/2010/main" val="3974873611"/>
+        <p14:creationId xmlns:p14="http://schemas.microsoft.com/office/powerpoint/2010/main" val="1414474473"/>
       </p:ext>
     </p:extLst>
   </p:cSld>
@@ -2443,15 +2445,15 @@
         </p:nvSpPr>
         <p:spPr>
           <a:xfrm>
-            <a:off x="867890" y="719984"/>
-            <a:ext cx="4063824" cy="2519945"/>
+            <a:off x="1983783" y="719986"/>
+            <a:ext cx="9288886" cy="2519945"/>
           </a:xfrm>
         </p:spPr>
         <p:txBody>
           <a:bodyPr anchor="b"/>
           <a:lstStyle>
             <a:lvl1pPr>
-              <a:defRPr sz="4410"/>
+              <a:defRPr sz="5040"/>
             </a:lvl1pPr>
           </a:lstStyle>
           <a:p>
@@ -2475,8 +2477,8 @@
         </p:nvSpPr>
         <p:spPr>
           <a:xfrm>
-            <a:off x="5356636" y="1554968"/>
-            <a:ext cx="6378744" cy="7674832"/>
+            <a:off x="12243932" y="1554966"/>
+            <a:ext cx="14580215" cy="7674832"/>
           </a:xfrm>
         </p:spPr>
         <p:txBody>
@@ -2484,39 +2486,39 @@
           <a:lstStyle>
             <a:lvl1pPr marL="0" indent="0">
               <a:buNone/>
+              <a:defRPr sz="5040"/>
+            </a:lvl1pPr>
+            <a:lvl2pPr marL="720000" indent="0">
+              <a:buNone/>
               <a:defRPr sz="4410"/>
-            </a:lvl1pPr>
-            <a:lvl2pPr marL="630022" indent="0">
+            </a:lvl2pPr>
+            <a:lvl3pPr marL="1439998" indent="0">
               <a:buNone/>
-              <a:defRPr sz="3858"/>
-            </a:lvl2pPr>
-            <a:lvl3pPr marL="1260043" indent="0">
+              <a:defRPr sz="3780"/>
+            </a:lvl3pPr>
+            <a:lvl4pPr marL="2159996" indent="0">
               <a:buNone/>
-              <a:defRPr sz="3307"/>
-            </a:lvl3pPr>
-            <a:lvl4pPr marL="1890065" indent="0">
+              <a:defRPr sz="3150"/>
+            </a:lvl4pPr>
+            <a:lvl5pPr marL="2879994" indent="0">
               <a:buNone/>
-              <a:defRPr sz="2756"/>
-            </a:lvl4pPr>
-            <a:lvl5pPr marL="2520086" indent="0">
+              <a:defRPr sz="3150"/>
+            </a:lvl5pPr>
+            <a:lvl6pPr marL="3599994" indent="0">
               <a:buNone/>
-              <a:defRPr sz="2756"/>
-            </a:lvl5pPr>
-            <a:lvl6pPr marL="3150108" indent="0">
+              <a:defRPr sz="3150"/>
+            </a:lvl6pPr>
+            <a:lvl7pPr marL="4319992" indent="0">
               <a:buNone/>
-              <a:defRPr sz="2756"/>
-            </a:lvl6pPr>
-            <a:lvl7pPr marL="3780130" indent="0">
+              <a:defRPr sz="3150"/>
+            </a:lvl7pPr>
+            <a:lvl8pPr marL="5039990" indent="0">
               <a:buNone/>
-              <a:defRPr sz="2756"/>
-            </a:lvl7pPr>
-            <a:lvl8pPr marL="4410151" indent="0">
+              <a:defRPr sz="3150"/>
+            </a:lvl8pPr>
+            <a:lvl9pPr marL="5759988" indent="0">
               <a:buNone/>
-              <a:defRPr sz="2756"/>
-            </a:lvl8pPr>
-            <a:lvl9pPr marL="5040173" indent="0">
-              <a:buNone/>
-              <a:defRPr sz="2756"/>
+              <a:defRPr sz="3150"/>
             </a:lvl9pPr>
           </a:lstStyle>
           <a:p>
@@ -2540,8 +2542,8 @@
         </p:nvSpPr>
         <p:spPr>
           <a:xfrm>
-            <a:off x="867890" y="3239929"/>
-            <a:ext cx="4063824" cy="6002369"/>
+            <a:off x="1983783" y="3239931"/>
+            <a:ext cx="9288886" cy="6002369"/>
           </a:xfrm>
         </p:spPr>
         <p:txBody>
@@ -2549,39 +2551,39 @@
           <a:lstStyle>
             <a:lvl1pPr marL="0" indent="0">
               <a:buNone/>
-              <a:defRPr sz="2205"/>
+              <a:defRPr sz="2520"/>
             </a:lvl1pPr>
-            <a:lvl2pPr marL="630022" indent="0">
+            <a:lvl2pPr marL="720000" indent="0">
               <a:buNone/>
-              <a:defRPr sz="1929"/>
+              <a:defRPr sz="2206"/>
             </a:lvl2pPr>
-            <a:lvl3pPr marL="1260043" indent="0">
+            <a:lvl3pPr marL="1439998" indent="0">
               <a:buNone/>
-              <a:defRPr sz="1654"/>
+              <a:defRPr sz="1890"/>
             </a:lvl3pPr>
-            <a:lvl4pPr marL="1890065" indent="0">
+            <a:lvl4pPr marL="2159996" indent="0">
               <a:buNone/>
-              <a:defRPr sz="1378"/>
+              <a:defRPr sz="1576"/>
             </a:lvl4pPr>
-            <a:lvl5pPr marL="2520086" indent="0">
+            <a:lvl5pPr marL="2879994" indent="0">
               <a:buNone/>
-              <a:defRPr sz="1378"/>
+              <a:defRPr sz="1576"/>
             </a:lvl5pPr>
-            <a:lvl6pPr marL="3150108" indent="0">
+            <a:lvl6pPr marL="3599994" indent="0">
               <a:buNone/>
-              <a:defRPr sz="1378"/>
+              <a:defRPr sz="1576"/>
             </a:lvl6pPr>
-            <a:lvl7pPr marL="3780130" indent="0">
+            <a:lvl7pPr marL="4319992" indent="0">
               <a:buNone/>
-              <a:defRPr sz="1378"/>
+              <a:defRPr sz="1576"/>
             </a:lvl7pPr>
-            <a:lvl8pPr marL="4410151" indent="0">
+            <a:lvl8pPr marL="5039990" indent="0">
               <a:buNone/>
-              <a:defRPr sz="1378"/>
+              <a:defRPr sz="1576"/>
             </a:lvl8pPr>
-            <a:lvl9pPr marL="5040173" indent="0">
+            <a:lvl9pPr marL="5759988" indent="0">
               <a:buNone/>
-              <a:defRPr sz="1378"/>
+              <a:defRPr sz="1576"/>
             </a:lvl9pPr>
           </a:lstStyle>
           <a:p>
@@ -2661,7 +2663,7 @@
     </p:spTree>
     <p:extLst>
       <p:ext uri="{BB962C8B-B14F-4D97-AF65-F5344CB8AC3E}">
-        <p14:creationId xmlns:p14="http://schemas.microsoft.com/office/powerpoint/2010/main" val="2410790519"/>
+        <p14:creationId xmlns:p14="http://schemas.microsoft.com/office/powerpoint/2010/main" val="4278935716"/>
       </p:ext>
     </p:extLst>
   </p:cSld>
@@ -2706,8 +2708,8 @@
         </p:nvSpPr>
         <p:spPr>
           <a:xfrm>
-            <a:off x="866249" y="574990"/>
-            <a:ext cx="10867490" cy="2087455"/>
+            <a:off x="1980030" y="574990"/>
+            <a:ext cx="24840367" cy="2087455"/>
           </a:xfrm>
           <a:prstGeom prst="rect">
             <a:avLst/>
@@ -2739,8 +2741,8 @@
         </p:nvSpPr>
         <p:spPr>
           <a:xfrm>
-            <a:off x="866249" y="2874937"/>
-            <a:ext cx="10867490" cy="6852350"/>
+            <a:off x="1980030" y="2874937"/>
+            <a:ext cx="24840367" cy="6852350"/>
           </a:xfrm>
           <a:prstGeom prst="rect">
             <a:avLst/>
@@ -2801,8 +2803,8 @@
         </p:nvSpPr>
         <p:spPr>
           <a:xfrm>
-            <a:off x="866249" y="10009783"/>
-            <a:ext cx="2834997" cy="574987"/>
+            <a:off x="1980030" y="10009783"/>
+            <a:ext cx="6480096" cy="574987"/>
           </a:xfrm>
           <a:prstGeom prst="rect">
             <a:avLst/>
@@ -2812,7 +2814,7 @@
           <a:bodyPr vert="horz" lIns="91440" tIns="45720" rIns="91440" bIns="45720" rtlCol="0" anchor="ctr"/>
           <a:lstStyle>
             <a:lvl1pPr algn="l">
-              <a:defRPr sz="1654">
+              <a:defRPr sz="1890">
                 <a:solidFill>
                   <a:schemeClr val="tx1">
                     <a:tint val="75000"/>
@@ -2842,8 +2844,8 @@
         </p:nvSpPr>
         <p:spPr>
           <a:xfrm>
-            <a:off x="4173746" y="10009783"/>
-            <a:ext cx="4252496" cy="574987"/>
+            <a:off x="9540141" y="10009783"/>
+            <a:ext cx="9720144" cy="574987"/>
           </a:xfrm>
           <a:prstGeom prst="rect">
             <a:avLst/>
@@ -2853,7 +2855,7 @@
           <a:bodyPr vert="horz" lIns="91440" tIns="45720" rIns="91440" bIns="45720" rtlCol="0" anchor="ctr"/>
           <a:lstStyle>
             <a:lvl1pPr algn="ctr">
-              <a:defRPr sz="1654">
+              <a:defRPr sz="1890">
                 <a:solidFill>
                   <a:schemeClr val="tx1">
                     <a:tint val="75000"/>
@@ -2879,8 +2881,8 @@
         </p:nvSpPr>
         <p:spPr>
           <a:xfrm>
-            <a:off x="8898742" y="10009783"/>
-            <a:ext cx="2834997" cy="574987"/>
+            <a:off x="20340299" y="10009783"/>
+            <a:ext cx="6480096" cy="574987"/>
           </a:xfrm>
           <a:prstGeom prst="rect">
             <a:avLst/>
@@ -2890,7 +2892,7 @@
           <a:bodyPr vert="horz" lIns="91440" tIns="45720" rIns="91440" bIns="45720" rtlCol="0" anchor="ctr"/>
           <a:lstStyle>
             <a:lvl1pPr algn="r">
-              <a:defRPr sz="1654">
+              <a:defRPr sz="1890">
                 <a:solidFill>
                   <a:schemeClr val="tx1">
                     <a:tint val="75000"/>
@@ -2911,29 +2913,29 @@
     </p:spTree>
     <p:extLst>
       <p:ext uri="{BB962C8B-B14F-4D97-AF65-F5344CB8AC3E}">
-        <p14:creationId xmlns:p14="http://schemas.microsoft.com/office/powerpoint/2010/main" val="3512123953"/>
+        <p14:creationId xmlns:p14="http://schemas.microsoft.com/office/powerpoint/2010/main" val="2647827908"/>
       </p:ext>
     </p:extLst>
   </p:cSld>
   <p:clrMap bg1="lt1" tx1="dk1" bg2="lt2" tx2="dk2" accent1="accent1" accent2="accent2" accent3="accent3" accent4="accent4" accent5="accent5" accent6="accent6" hlink="hlink" folHlink="folHlink"/>
   <p:sldLayoutIdLst>
-    <p:sldLayoutId id="2147483677" r:id="rId1"/>
-    <p:sldLayoutId id="2147483678" r:id="rId2"/>
-    <p:sldLayoutId id="2147483679" r:id="rId3"/>
-    <p:sldLayoutId id="2147483680" r:id="rId4"/>
-    <p:sldLayoutId id="2147483681" r:id="rId5"/>
-    <p:sldLayoutId id="2147483682" r:id="rId6"/>
-    <p:sldLayoutId id="2147483683" r:id="rId7"/>
-    <p:sldLayoutId id="2147483684" r:id="rId8"/>
-    <p:sldLayoutId id="2147483685" r:id="rId9"/>
-    <p:sldLayoutId id="2147483686" r:id="rId10"/>
-    <p:sldLayoutId id="2147483687" r:id="rId11"/>
-    <p:sldLayoutId id="2147483688" r:id="rId12"/>
+    <p:sldLayoutId id="2147483703" r:id="rId1"/>
+    <p:sldLayoutId id="2147483704" r:id="rId2"/>
+    <p:sldLayoutId id="2147483705" r:id="rId3"/>
+    <p:sldLayoutId id="2147483706" r:id="rId4"/>
+    <p:sldLayoutId id="2147483707" r:id="rId5"/>
+    <p:sldLayoutId id="2147483708" r:id="rId6"/>
+    <p:sldLayoutId id="2147483709" r:id="rId7"/>
+    <p:sldLayoutId id="2147483710" r:id="rId8"/>
+    <p:sldLayoutId id="2147483711" r:id="rId9"/>
+    <p:sldLayoutId id="2147483712" r:id="rId10"/>
+    <p:sldLayoutId id="2147483713" r:id="rId11"/>
+    <p:sldLayoutId id="2147483714" r:id="rId12"/>
   </p:sldLayoutIdLst>
   <p:hf sldNum="0" hdr="0" ftr="0" dt="0"/>
   <p:txStyles>
     <p:titleStyle>
-      <a:lvl1pPr algn="l" defTabSz="1260043" rtl="0" eaLnBrk="1" latinLnBrk="1" hangingPunct="1">
+      <a:lvl1pPr algn="l" defTabSz="1439998" rtl="0" eaLnBrk="1" latinLnBrk="1" hangingPunct="1">
         <a:lnSpc>
           <a:spcPct val="90000"/>
         </a:lnSpc>
@@ -2941,7 +2943,7 @@
           <a:spcPct val="0"/>
         </a:spcBef>
         <a:buNone/>
-        <a:defRPr sz="6063" kern="1200">
+        <a:defRPr sz="6930" kern="1200">
           <a:solidFill>
             <a:schemeClr val="tx1"/>
           </a:solidFill>
@@ -2952,16 +2954,16 @@
       </a:lvl1pPr>
     </p:titleStyle>
     <p:bodyStyle>
-      <a:lvl1pPr marL="315011" indent="-315011" algn="l" defTabSz="1260043" rtl="0" eaLnBrk="1" latinLnBrk="1" hangingPunct="1">
+      <a:lvl1pPr marL="360000" indent="-360000" algn="l" defTabSz="1439998" rtl="0" eaLnBrk="1" latinLnBrk="1" hangingPunct="1">
         <a:lnSpc>
           <a:spcPct val="90000"/>
         </a:lnSpc>
         <a:spcBef>
-          <a:spcPts val="1378"/>
+          <a:spcPts val="1576"/>
         </a:spcBef>
         <a:buFont typeface="Arial" panose="020B0604020202020204" pitchFamily="34" charset="0"/>
         <a:buChar char="•"/>
-        <a:defRPr sz="3858" kern="1200">
+        <a:defRPr sz="4410" kern="1200">
           <a:solidFill>
             <a:schemeClr val="tx1"/>
           </a:solidFill>
@@ -2970,16 +2972,16 @@
           <a:cs typeface="+mn-cs"/>
         </a:defRPr>
       </a:lvl1pPr>
-      <a:lvl2pPr marL="945032" indent="-315011" algn="l" defTabSz="1260043" rtl="0" eaLnBrk="1" latinLnBrk="1" hangingPunct="1">
+      <a:lvl2pPr marL="1079998" indent="-360000" algn="l" defTabSz="1439998" rtl="0" eaLnBrk="1" latinLnBrk="1" hangingPunct="1">
         <a:lnSpc>
           <a:spcPct val="90000"/>
         </a:lnSpc>
         <a:spcBef>
-          <a:spcPts val="689"/>
+          <a:spcPts val="788"/>
         </a:spcBef>
         <a:buFont typeface="Arial" panose="020B0604020202020204" pitchFamily="34" charset="0"/>
         <a:buChar char="•"/>
-        <a:defRPr sz="3307" kern="1200">
+        <a:defRPr sz="3780" kern="1200">
           <a:solidFill>
             <a:schemeClr val="tx1"/>
           </a:solidFill>
@@ -2988,16 +2990,16 @@
           <a:cs typeface="+mn-cs"/>
         </a:defRPr>
       </a:lvl2pPr>
-      <a:lvl3pPr marL="1575054" indent="-315011" algn="l" defTabSz="1260043" rtl="0" eaLnBrk="1" latinLnBrk="1" hangingPunct="1">
+      <a:lvl3pPr marL="1799996" indent="-360000" algn="l" defTabSz="1439998" rtl="0" eaLnBrk="1" latinLnBrk="1" hangingPunct="1">
         <a:lnSpc>
           <a:spcPct val="90000"/>
         </a:lnSpc>
         <a:spcBef>
-          <a:spcPts val="689"/>
+          <a:spcPts val="788"/>
         </a:spcBef>
         <a:buFont typeface="Arial" panose="020B0604020202020204" pitchFamily="34" charset="0"/>
         <a:buChar char="•"/>
-        <a:defRPr sz="2756" kern="1200">
+        <a:defRPr sz="3150" kern="1200">
           <a:solidFill>
             <a:schemeClr val="tx1"/>
           </a:solidFill>
@@ -3006,16 +3008,16 @@
           <a:cs typeface="+mn-cs"/>
         </a:defRPr>
       </a:lvl3pPr>
-      <a:lvl4pPr marL="2205076" indent="-315011" algn="l" defTabSz="1260043" rtl="0" eaLnBrk="1" latinLnBrk="1" hangingPunct="1">
+      <a:lvl4pPr marL="2519996" indent="-360000" algn="l" defTabSz="1439998" rtl="0" eaLnBrk="1" latinLnBrk="1" hangingPunct="1">
         <a:lnSpc>
           <a:spcPct val="90000"/>
         </a:lnSpc>
         <a:spcBef>
-          <a:spcPts val="689"/>
+          <a:spcPts val="788"/>
         </a:spcBef>
         <a:buFont typeface="Arial" panose="020B0604020202020204" pitchFamily="34" charset="0"/>
         <a:buChar char="•"/>
-        <a:defRPr sz="2480" kern="1200">
+        <a:defRPr sz="2836" kern="1200">
           <a:solidFill>
             <a:schemeClr val="tx1"/>
           </a:solidFill>
@@ -3024,16 +3026,16 @@
           <a:cs typeface="+mn-cs"/>
         </a:defRPr>
       </a:lvl4pPr>
-      <a:lvl5pPr marL="2835097" indent="-315011" algn="l" defTabSz="1260043" rtl="0" eaLnBrk="1" latinLnBrk="1" hangingPunct="1">
+      <a:lvl5pPr marL="3239994" indent="-360000" algn="l" defTabSz="1439998" rtl="0" eaLnBrk="1" latinLnBrk="1" hangingPunct="1">
         <a:lnSpc>
           <a:spcPct val="90000"/>
         </a:lnSpc>
         <a:spcBef>
-          <a:spcPts val="689"/>
+          <a:spcPts val="788"/>
         </a:spcBef>
         <a:buFont typeface="Arial" panose="020B0604020202020204" pitchFamily="34" charset="0"/>
         <a:buChar char="•"/>
-        <a:defRPr sz="2480" kern="1200">
+        <a:defRPr sz="2836" kern="1200">
           <a:solidFill>
             <a:schemeClr val="tx1"/>
           </a:solidFill>
@@ -3042,16 +3044,16 @@
           <a:cs typeface="+mn-cs"/>
         </a:defRPr>
       </a:lvl5pPr>
-      <a:lvl6pPr marL="3465119" indent="-315011" algn="l" defTabSz="1260043" rtl="0" eaLnBrk="1" latinLnBrk="1" hangingPunct="1">
+      <a:lvl6pPr marL="3959992" indent="-360000" algn="l" defTabSz="1439998" rtl="0" eaLnBrk="1" latinLnBrk="1" hangingPunct="1">
         <a:lnSpc>
           <a:spcPct val="90000"/>
         </a:lnSpc>
         <a:spcBef>
-          <a:spcPts val="689"/>
+          <a:spcPts val="788"/>
         </a:spcBef>
         <a:buFont typeface="Arial" panose="020B0604020202020204" pitchFamily="34" charset="0"/>
         <a:buChar char="•"/>
-        <a:defRPr sz="2480" kern="1200">
+        <a:defRPr sz="2836" kern="1200">
           <a:solidFill>
             <a:schemeClr val="tx1"/>
           </a:solidFill>
@@ -3060,16 +3062,16 @@
           <a:cs typeface="+mn-cs"/>
         </a:defRPr>
       </a:lvl6pPr>
-      <a:lvl7pPr marL="4095140" indent="-315011" algn="l" defTabSz="1260043" rtl="0" eaLnBrk="1" latinLnBrk="1" hangingPunct="1">
+      <a:lvl7pPr marL="4679992" indent="-360000" algn="l" defTabSz="1439998" rtl="0" eaLnBrk="1" latinLnBrk="1" hangingPunct="1">
         <a:lnSpc>
           <a:spcPct val="90000"/>
         </a:lnSpc>
         <a:spcBef>
-          <a:spcPts val="689"/>
+          <a:spcPts val="788"/>
         </a:spcBef>
         <a:buFont typeface="Arial" panose="020B0604020202020204" pitchFamily="34" charset="0"/>
         <a:buChar char="•"/>
-        <a:defRPr sz="2480" kern="1200">
+        <a:defRPr sz="2836" kern="1200">
           <a:solidFill>
             <a:schemeClr val="tx1"/>
           </a:solidFill>
@@ -3078,16 +3080,16 @@
           <a:cs typeface="+mn-cs"/>
         </a:defRPr>
       </a:lvl7pPr>
-      <a:lvl8pPr marL="4725162" indent="-315011" algn="l" defTabSz="1260043" rtl="0" eaLnBrk="1" latinLnBrk="1" hangingPunct="1">
+      <a:lvl8pPr marL="5399990" indent="-360000" algn="l" defTabSz="1439998" rtl="0" eaLnBrk="1" latinLnBrk="1" hangingPunct="1">
         <a:lnSpc>
           <a:spcPct val="90000"/>
         </a:lnSpc>
         <a:spcBef>
-          <a:spcPts val="689"/>
+          <a:spcPts val="788"/>
         </a:spcBef>
         <a:buFont typeface="Arial" panose="020B0604020202020204" pitchFamily="34" charset="0"/>
         <a:buChar char="•"/>
-        <a:defRPr sz="2480" kern="1200">
+        <a:defRPr sz="2836" kern="1200">
           <a:solidFill>
             <a:schemeClr val="tx1"/>
           </a:solidFill>
@@ -3096,16 +3098,16 @@
           <a:cs typeface="+mn-cs"/>
         </a:defRPr>
       </a:lvl8pPr>
-      <a:lvl9pPr marL="5355184" indent="-315011" algn="l" defTabSz="1260043" rtl="0" eaLnBrk="1" latinLnBrk="1" hangingPunct="1">
+      <a:lvl9pPr marL="6119988" indent="-360000" algn="l" defTabSz="1439998" rtl="0" eaLnBrk="1" latinLnBrk="1" hangingPunct="1">
         <a:lnSpc>
           <a:spcPct val="90000"/>
         </a:lnSpc>
         <a:spcBef>
-          <a:spcPts val="689"/>
+          <a:spcPts val="788"/>
         </a:spcBef>
         <a:buFont typeface="Arial" panose="020B0604020202020204" pitchFamily="34" charset="0"/>
         <a:buChar char="•"/>
-        <a:defRPr sz="2480" kern="1200">
+        <a:defRPr sz="2836" kern="1200">
           <a:solidFill>
             <a:schemeClr val="tx1"/>
           </a:solidFill>
@@ -3119,8 +3121,8 @@
       <a:defPPr>
         <a:defRPr lang="en-US"/>
       </a:defPPr>
-      <a:lvl1pPr marL="0" algn="l" defTabSz="1260043" rtl="0" eaLnBrk="1" latinLnBrk="1" hangingPunct="1">
-        <a:defRPr sz="2480" kern="1200">
+      <a:lvl1pPr marL="0" algn="l" defTabSz="1439998" rtl="0" eaLnBrk="1" latinLnBrk="1" hangingPunct="1">
+        <a:defRPr sz="2836" kern="1200">
           <a:solidFill>
             <a:schemeClr val="tx1"/>
           </a:solidFill>
@@ -3129,8 +3131,8 @@
           <a:cs typeface="+mn-cs"/>
         </a:defRPr>
       </a:lvl1pPr>
-      <a:lvl2pPr marL="630022" algn="l" defTabSz="1260043" rtl="0" eaLnBrk="1" latinLnBrk="1" hangingPunct="1">
-        <a:defRPr sz="2480" kern="1200">
+      <a:lvl2pPr marL="720000" algn="l" defTabSz="1439998" rtl="0" eaLnBrk="1" latinLnBrk="1" hangingPunct="1">
+        <a:defRPr sz="2836" kern="1200">
           <a:solidFill>
             <a:schemeClr val="tx1"/>
           </a:solidFill>
@@ -3139,8 +3141,8 @@
           <a:cs typeface="+mn-cs"/>
         </a:defRPr>
       </a:lvl2pPr>
-      <a:lvl3pPr marL="1260043" algn="l" defTabSz="1260043" rtl="0" eaLnBrk="1" latinLnBrk="1" hangingPunct="1">
-        <a:defRPr sz="2480" kern="1200">
+      <a:lvl3pPr marL="1439998" algn="l" defTabSz="1439998" rtl="0" eaLnBrk="1" latinLnBrk="1" hangingPunct="1">
+        <a:defRPr sz="2836" kern="1200">
           <a:solidFill>
             <a:schemeClr val="tx1"/>
           </a:solidFill>
@@ -3149,8 +3151,8 @@
           <a:cs typeface="+mn-cs"/>
         </a:defRPr>
       </a:lvl3pPr>
-      <a:lvl4pPr marL="1890065" algn="l" defTabSz="1260043" rtl="0" eaLnBrk="1" latinLnBrk="1" hangingPunct="1">
-        <a:defRPr sz="2480" kern="1200">
+      <a:lvl4pPr marL="2159996" algn="l" defTabSz="1439998" rtl="0" eaLnBrk="1" latinLnBrk="1" hangingPunct="1">
+        <a:defRPr sz="2836" kern="1200">
           <a:solidFill>
             <a:schemeClr val="tx1"/>
           </a:solidFill>
@@ -3159,8 +3161,8 @@
           <a:cs typeface="+mn-cs"/>
         </a:defRPr>
       </a:lvl4pPr>
-      <a:lvl5pPr marL="2520086" algn="l" defTabSz="1260043" rtl="0" eaLnBrk="1" latinLnBrk="1" hangingPunct="1">
-        <a:defRPr sz="2480" kern="1200">
+      <a:lvl5pPr marL="2879994" algn="l" defTabSz="1439998" rtl="0" eaLnBrk="1" latinLnBrk="1" hangingPunct="1">
+        <a:defRPr sz="2836" kern="1200">
           <a:solidFill>
             <a:schemeClr val="tx1"/>
           </a:solidFill>
@@ -3169,8 +3171,8 @@
           <a:cs typeface="+mn-cs"/>
         </a:defRPr>
       </a:lvl5pPr>
-      <a:lvl6pPr marL="3150108" algn="l" defTabSz="1260043" rtl="0" eaLnBrk="1" latinLnBrk="1" hangingPunct="1">
-        <a:defRPr sz="2480" kern="1200">
+      <a:lvl6pPr marL="3599994" algn="l" defTabSz="1439998" rtl="0" eaLnBrk="1" latinLnBrk="1" hangingPunct="1">
+        <a:defRPr sz="2836" kern="1200">
           <a:solidFill>
             <a:schemeClr val="tx1"/>
           </a:solidFill>
@@ -3179,8 +3181,8 @@
           <a:cs typeface="+mn-cs"/>
         </a:defRPr>
       </a:lvl6pPr>
-      <a:lvl7pPr marL="3780130" algn="l" defTabSz="1260043" rtl="0" eaLnBrk="1" latinLnBrk="1" hangingPunct="1">
-        <a:defRPr sz="2480" kern="1200">
+      <a:lvl7pPr marL="4319992" algn="l" defTabSz="1439998" rtl="0" eaLnBrk="1" latinLnBrk="1" hangingPunct="1">
+        <a:defRPr sz="2836" kern="1200">
           <a:solidFill>
             <a:schemeClr val="tx1"/>
           </a:solidFill>
@@ -3189,8 +3191,8 @@
           <a:cs typeface="+mn-cs"/>
         </a:defRPr>
       </a:lvl7pPr>
-      <a:lvl8pPr marL="4410151" algn="l" defTabSz="1260043" rtl="0" eaLnBrk="1" latinLnBrk="1" hangingPunct="1">
-        <a:defRPr sz="2480" kern="1200">
+      <a:lvl8pPr marL="5039990" algn="l" defTabSz="1439998" rtl="0" eaLnBrk="1" latinLnBrk="1" hangingPunct="1">
+        <a:defRPr sz="2836" kern="1200">
           <a:solidFill>
             <a:schemeClr val="tx1"/>
           </a:solidFill>
@@ -3199,8 +3201,8 @@
           <a:cs typeface="+mn-cs"/>
         </a:defRPr>
       </a:lvl8pPr>
-      <a:lvl9pPr marL="5040173" algn="l" defTabSz="1260043" rtl="0" eaLnBrk="1" latinLnBrk="1" hangingPunct="1">
-        <a:defRPr sz="2480" kern="1200">
+      <a:lvl9pPr marL="5759988" algn="l" defTabSz="1439998" rtl="0" eaLnBrk="1" latinLnBrk="1" hangingPunct="1">
+        <a:defRPr sz="2836" kern="1200">
           <a:solidFill>
             <a:schemeClr val="tx1"/>
           </a:solidFill>
@@ -3239,8 +3241,8 @@
         </p:nvSpPr>
         <p:spPr>
           <a:xfrm>
-            <a:off x="1190761" y="92902"/>
-            <a:ext cx="2706365" cy="403412"/>
+            <a:off x="268525" y="95347"/>
+            <a:ext cx="2706366" cy="403412"/>
           </a:xfrm>
           <a:prstGeom prst="rect">
             <a:avLst/>
@@ -3275,7 +3277,7 @@
         </p:nvSpPr>
         <p:spPr>
           <a:xfrm>
-            <a:off x="3013100" y="962807"/>
+            <a:off x="4577066" y="962807"/>
             <a:ext cx="365760" cy="365760"/>
           </a:xfrm>
           <a:prstGeom prst="ellipse">
@@ -3300,7 +3302,7 @@
         </p:nvSpPr>
         <p:spPr>
           <a:xfrm>
-            <a:off x="2921660" y="1237128"/>
+            <a:off x="4485626" y="1237129"/>
             <a:ext cx="548640" cy="274320"/>
           </a:xfrm>
           <a:prstGeom prst="ellipse">
@@ -3325,7 +3327,7 @@
         </p:nvSpPr>
         <p:spPr>
           <a:xfrm>
-            <a:off x="2863554" y="1463038"/>
+            <a:off x="4427520" y="1463039"/>
             <a:ext cx="664852" cy="274320"/>
           </a:xfrm>
           <a:prstGeom prst="rect">
@@ -3362,8 +3364,8 @@
         </p:nvSpPr>
         <p:spPr>
           <a:xfrm>
-            <a:off x="5942720" y="960229"/>
-            <a:ext cx="4986389" cy="655544"/>
+            <a:off x="7506689" y="960229"/>
+            <a:ext cx="4986390" cy="655544"/>
           </a:xfrm>
           <a:prstGeom prst="roundRect">
             <a:avLst/>
@@ -3387,8 +3389,8 @@
         </p:nvSpPr>
         <p:spPr>
           <a:xfrm>
-            <a:off x="6034160" y="1005949"/>
-            <a:ext cx="4803509" cy="564104"/>
+            <a:off x="7598129" y="1005949"/>
+            <a:ext cx="4803510" cy="564104"/>
           </a:xfrm>
           <a:prstGeom prst="rect">
             <a:avLst/>
@@ -3479,8 +3481,8 @@
         </p:nvSpPr>
         <p:spPr>
           <a:xfrm>
-            <a:off x="1310766" y="2478171"/>
-            <a:ext cx="3767494" cy="1512794"/>
+            <a:off x="2874733" y="2478171"/>
+            <a:ext cx="3767494" cy="2684380"/>
           </a:xfrm>
           <a:prstGeom prst="roundRect">
             <a:avLst/>
@@ -3504,7 +3506,7 @@
         </p:nvSpPr>
         <p:spPr>
           <a:xfrm>
-            <a:off x="1403673" y="2813218"/>
+            <a:off x="2967641" y="2813219"/>
             <a:ext cx="3584614" cy="320040"/>
           </a:xfrm>
           <a:prstGeom prst="roundRect">
@@ -3524,7 +3526,7 @@
         </p:nvSpPr>
         <p:spPr>
           <a:xfrm>
-            <a:off x="3400353" y="3298219"/>
+            <a:off x="4964320" y="3298219"/>
             <a:ext cx="1554480" cy="365760"/>
           </a:xfrm>
           <a:prstGeom prst="roundRect">
@@ -3540,6 +3542,13 @@
             <a:prstDash val="solid"/>
           </a:ln>
         </p:spPr>
+        <p:txBody>
+          <a:bodyPr/>
+          <a:lstStyle/>
+          <a:p>
+            <a:endParaRPr lang="ko-KR" altLang="en-US" dirty="0"/>
+          </a:p>
+        </p:txBody>
       </p:sp>
       <p:sp>
         <p:nvSpPr>
@@ -3549,8 +3558,8 @@
         </p:nvSpPr>
         <p:spPr>
           <a:xfrm>
-            <a:off x="1912830" y="2520072"/>
-            <a:ext cx="2566303" cy="274320"/>
+            <a:off x="3476798" y="2520073"/>
+            <a:ext cx="2566304" cy="274320"/>
           </a:xfrm>
           <a:prstGeom prst="rect">
             <a:avLst/>
@@ -3585,7 +3594,7 @@
         </p:nvSpPr>
         <p:spPr>
           <a:xfrm>
-            <a:off x="1403673" y="2813218"/>
+            <a:off x="2967641" y="2813219"/>
             <a:ext cx="3584614" cy="320040"/>
           </a:xfrm>
           <a:prstGeom prst="rect">
@@ -3622,7 +3631,7 @@
         </p:nvSpPr>
         <p:spPr>
           <a:xfrm>
-            <a:off x="3400353" y="3298219"/>
+            <a:off x="4964320" y="3298219"/>
             <a:ext cx="1554480" cy="365760"/>
           </a:xfrm>
           <a:prstGeom prst="rect">
@@ -3659,8 +3668,8 @@
         </p:nvSpPr>
         <p:spPr>
           <a:xfrm>
-            <a:off x="7243012" y="3133258"/>
-            <a:ext cx="4986387" cy="921600"/>
+            <a:off x="8806980" y="3133259"/>
+            <a:ext cx="4986388" cy="1850876"/>
           </a:xfrm>
           <a:prstGeom prst="roundRect">
             <a:avLst/>
@@ -3684,8 +3693,8 @@
         </p:nvSpPr>
         <p:spPr>
           <a:xfrm>
-            <a:off x="7334451" y="3208604"/>
-            <a:ext cx="4238849" cy="694176"/>
+            <a:off x="8898421" y="3208605"/>
+            <a:ext cx="4238850" cy="694176"/>
           </a:xfrm>
           <a:prstGeom prst="rect">
             <a:avLst/>
@@ -3744,7 +3753,7 @@
                 <a:latin typeface="Arial" pitchFamily="34" charset="0"/>
                 <a:cs typeface="Arial" pitchFamily="34" charset="-120"/>
               </a:rPr>
-              <a:t>API  Key Secret Storage</a:t>
+              <a:t>API  Key, Admin Token Secret Storage</a:t>
             </a:r>
             <a:endParaRPr lang="en-US" sz="1150" dirty="0"/>
           </a:p>
@@ -3758,8 +3767,8 @@
         </p:nvSpPr>
         <p:spPr>
           <a:xfrm>
-            <a:off x="7242361" y="4845190"/>
-            <a:ext cx="4792703" cy="921600"/>
+            <a:off x="8814194" y="5786881"/>
+            <a:ext cx="4986388" cy="921600"/>
           </a:xfrm>
           <a:prstGeom prst="roundRect">
             <a:avLst/>
@@ -3783,8 +3792,8 @@
         </p:nvSpPr>
         <p:spPr>
           <a:xfrm>
-            <a:off x="7333801" y="4890910"/>
-            <a:ext cx="4360275" cy="1017942"/>
+            <a:off x="8956192" y="5828010"/>
+            <a:ext cx="4360276" cy="1017942"/>
           </a:xfrm>
           <a:prstGeom prst="rect">
             <a:avLst/>
@@ -3823,91 +3832,112 @@
           </a:p>
         </p:txBody>
       </p:sp>
-      <p:sp>
-        <p:nvSpPr>
-          <p:cNvPr id="20" name="Shape 18"/>
-          <p:cNvSpPr/>
+      <p:grpSp>
+        <p:nvGrpSpPr>
+          <p:cNvPr id="29" name="그룹 28">
+            <a:extLst>
+              <a:ext uri="{FF2B5EF4-FFF2-40B4-BE49-F238E27FC236}">
+                <a16:creationId xmlns:a16="http://schemas.microsoft.com/office/drawing/2014/main" id="{E8319843-3906-AFAA-9635-4C75B3069514}"/>
+              </a:ext>
+            </a:extLst>
+          </p:cNvPr>
+          <p:cNvGrpSpPr/>
           <p:nvPr/>
-        </p:nvSpPr>
-        <p:spPr>
-          <a:xfrm>
-            <a:off x="2543942" y="4561381"/>
-            <a:ext cx="1329704" cy="1411941"/>
-          </a:xfrm>
-          <a:prstGeom prst="roundRect">
-            <a:avLst/>
-          </a:prstGeom>
-          <a:solidFill>
-            <a:srgbClr val="FFFFFF"/>
-          </a:solidFill>
-          <a:ln w="19050">
+        </p:nvGrpSpPr>
+        <p:grpSpPr>
+          <a:xfrm>
+            <a:off x="297912" y="3623198"/>
+            <a:ext cx="1329704" cy="1411942"/>
+            <a:chOff x="5244279" y="4561382"/>
+            <a:chExt cx="1329704" cy="1411941"/>
+          </a:xfrm>
+        </p:grpSpPr>
+        <p:sp>
+          <p:nvSpPr>
+            <p:cNvPr id="20" name="Shape 18"/>
+            <p:cNvSpPr/>
+            <p:nvPr/>
+          </p:nvSpPr>
+          <p:spPr>
+            <a:xfrm>
+              <a:off x="5244279" y="4561382"/>
+              <a:ext cx="1329704" cy="1411941"/>
+            </a:xfrm>
+            <a:prstGeom prst="roundRect">
+              <a:avLst/>
+            </a:prstGeom>
             <a:solidFill>
-              <a:srgbClr val="94A3B8"/>
+              <a:srgbClr val="FFFFFF"/>
             </a:solidFill>
-            <a:prstDash val="solid"/>
-          </a:ln>
-        </p:spPr>
-      </p:sp>
-      <p:sp>
-        <p:nvSpPr>
-          <p:cNvPr id="21" name="Shape 19"/>
-          <p:cNvSpPr/>
-          <p:nvPr/>
-        </p:nvSpPr>
-        <p:spPr>
-          <a:xfrm>
-            <a:off x="3025913" y="4607097"/>
-            <a:ext cx="365760" cy="45720"/>
-          </a:xfrm>
-          <a:prstGeom prst="roundRect">
-            <a:avLst/>
-          </a:prstGeom>
-          <a:solidFill>
-            <a:srgbClr val="E2E8F0"/>
-          </a:solidFill>
-          <a:ln/>
-        </p:spPr>
-      </p:sp>
-      <p:sp>
-        <p:nvSpPr>
-          <p:cNvPr id="22" name="Shape 20"/>
-          <p:cNvSpPr/>
-          <p:nvPr/>
-        </p:nvSpPr>
-        <p:spPr>
-          <a:xfrm>
-            <a:off x="2635382" y="4744257"/>
-            <a:ext cx="963944" cy="182880"/>
-          </a:xfrm>
-          <a:prstGeom prst="roundRect">
-            <a:avLst/>
-          </a:prstGeom>
-          <a:solidFill>
-            <a:srgbClr val="F1F5F9"/>
-          </a:solidFill>
-          <a:ln/>
-        </p:spPr>
-      </p:sp>
-      <p:sp>
-        <p:nvSpPr>
-          <p:cNvPr id="23" name="Shape 21"/>
-          <p:cNvSpPr/>
-          <p:nvPr/>
-        </p:nvSpPr>
-        <p:spPr>
-          <a:xfrm>
-            <a:off x="2818262" y="4972857"/>
-            <a:ext cx="963944" cy="182880"/>
-          </a:xfrm>
-          <a:prstGeom prst="roundRect">
-            <a:avLst/>
-          </a:prstGeom>
-          <a:solidFill>
-            <a:srgbClr val="0284C7"/>
-          </a:solidFill>
-          <a:ln/>
-        </p:spPr>
-      </p:sp>
+            <a:ln w="19050">
+              <a:solidFill>
+                <a:srgbClr val="94A3B8"/>
+              </a:solidFill>
+              <a:prstDash val="solid"/>
+            </a:ln>
+          </p:spPr>
+        </p:sp>
+        <p:sp>
+          <p:nvSpPr>
+            <p:cNvPr id="21" name="Shape 19"/>
+            <p:cNvSpPr/>
+            <p:nvPr/>
+          </p:nvSpPr>
+          <p:spPr>
+            <a:xfrm>
+              <a:off x="5726250" y="4607097"/>
+              <a:ext cx="365760" cy="45720"/>
+            </a:xfrm>
+            <a:prstGeom prst="roundRect">
+              <a:avLst/>
+            </a:prstGeom>
+            <a:solidFill>
+              <a:srgbClr val="E2E8F0"/>
+            </a:solidFill>
+            <a:ln/>
+          </p:spPr>
+        </p:sp>
+        <p:sp>
+          <p:nvSpPr>
+            <p:cNvPr id="22" name="Shape 20"/>
+            <p:cNvSpPr/>
+            <p:nvPr/>
+          </p:nvSpPr>
+          <p:spPr>
+            <a:xfrm>
+              <a:off x="5335719" y="4744257"/>
+              <a:ext cx="963944" cy="182880"/>
+            </a:xfrm>
+            <a:prstGeom prst="roundRect">
+              <a:avLst/>
+            </a:prstGeom>
+            <a:solidFill>
+              <a:srgbClr val="F1F5F9"/>
+            </a:solidFill>
+            <a:ln/>
+          </p:spPr>
+        </p:sp>
+        <p:sp>
+          <p:nvSpPr>
+            <p:cNvPr id="23" name="Shape 21"/>
+            <p:cNvSpPr/>
+            <p:nvPr/>
+          </p:nvSpPr>
+          <p:spPr>
+            <a:xfrm>
+              <a:off x="5518599" y="4972857"/>
+              <a:ext cx="963944" cy="182880"/>
+            </a:xfrm>
+            <a:prstGeom prst="roundRect">
+              <a:avLst/>
+            </a:prstGeom>
+            <a:solidFill>
+              <a:srgbClr val="0284C7"/>
+            </a:solidFill>
+            <a:ln/>
+          </p:spPr>
+        </p:sp>
+      </p:grpSp>
       <p:sp>
         <p:nvSpPr>
           <p:cNvPr id="24" name="Text 22"/>
@@ -3916,7 +3946,7 @@
         </p:nvSpPr>
         <p:spPr>
           <a:xfrm>
-            <a:off x="2653201" y="11698027"/>
+            <a:off x="10753419" y="11698027"/>
             <a:ext cx="1695464" cy="274320"/>
           </a:xfrm>
           <a:prstGeom prst="rect">
@@ -3953,8 +3983,8 @@
         </p:nvSpPr>
         <p:spPr>
           <a:xfrm>
-            <a:off x="3195980" y="1740048"/>
-            <a:ext cx="0" cy="705971"/>
+            <a:off x="4759946" y="1740051"/>
+            <a:ext cx="0" cy="705972"/>
           </a:xfrm>
           <a:prstGeom prst="line">
             <a:avLst/>
@@ -3977,7 +4007,7 @@
         </p:nvSpPr>
         <p:spPr>
           <a:xfrm>
-            <a:off x="2970253" y="1801004"/>
+            <a:off x="4534220" y="1801005"/>
             <a:ext cx="1828800" cy="457200"/>
           </a:xfrm>
           <a:prstGeom prst="rect">
@@ -4014,8 +4044,8 @@
         </p:nvSpPr>
         <p:spPr>
           <a:xfrm>
-            <a:off x="7393074" y="1657343"/>
-            <a:ext cx="0" cy="302559"/>
+            <a:off x="8957040" y="1657345"/>
+            <a:ext cx="0" cy="302560"/>
           </a:xfrm>
           <a:prstGeom prst="line">
             <a:avLst/>
@@ -4038,7 +4068,7 @@
         </p:nvSpPr>
         <p:spPr>
           <a:xfrm>
-            <a:off x="7077233" y="1551103"/>
+            <a:off x="8641200" y="1551103"/>
             <a:ext cx="1828800" cy="457200"/>
           </a:xfrm>
           <a:prstGeom prst="rect">
@@ -4075,8 +4105,8 @@
         </p:nvSpPr>
         <p:spPr>
           <a:xfrm>
-            <a:off x="5190001" y="3481993"/>
-            <a:ext cx="1883747" cy="0"/>
+            <a:off x="6761896" y="3288711"/>
+            <a:ext cx="1883748" cy="0"/>
           </a:xfrm>
           <a:prstGeom prst="line">
             <a:avLst/>
@@ -4099,7 +4129,7 @@
         </p:nvSpPr>
         <p:spPr>
           <a:xfrm>
-            <a:off x="5217473" y="3024793"/>
+            <a:off x="6789366" y="2831511"/>
             <a:ext cx="1828800" cy="457200"/>
           </a:xfrm>
           <a:prstGeom prst="rect">
@@ -4151,7 +4181,7 @@
         </p:nvSpPr>
         <p:spPr>
           <a:xfrm>
-            <a:off x="5217104" y="3660860"/>
+            <a:off x="6812400" y="3394597"/>
             <a:ext cx="1828800" cy="457200"/>
           </a:xfrm>
           <a:prstGeom prst="rect">
@@ -4203,7 +4233,7 @@
         </p:nvSpPr>
         <p:spPr>
           <a:xfrm>
-            <a:off x="8591286" y="4143375"/>
+            <a:off x="10265362" y="5085066"/>
             <a:ext cx="0" cy="600882"/>
           </a:xfrm>
           <a:prstGeom prst="line">
@@ -4227,7 +4257,7 @@
         </p:nvSpPr>
         <p:spPr>
           <a:xfrm>
-            <a:off x="7034524" y="4204658"/>
+            <a:off x="8708600" y="5146349"/>
             <a:ext cx="1828800" cy="457200"/>
           </a:xfrm>
           <a:prstGeom prst="rect">
@@ -4278,7 +4308,7 @@
         </p:nvSpPr>
         <p:spPr>
           <a:xfrm>
-            <a:off x="9350314" y="4204658"/>
+            <a:off x="11024390" y="5146349"/>
             <a:ext cx="1828800" cy="457200"/>
           </a:xfrm>
           <a:prstGeom prst="rect">
@@ -4327,9 +4357,9 @@
           <p:nvPr/>
         </p:nvSpPr>
         <p:spPr>
-          <a:xfrm>
-            <a:off x="3217487" y="4066047"/>
-            <a:ext cx="0" cy="403412"/>
+          <a:xfrm flipH="1">
+            <a:off x="1785819" y="3190231"/>
+            <a:ext cx="902278" cy="0"/>
           </a:xfrm>
           <a:prstGeom prst="line">
             <a:avLst/>
@@ -4352,8 +4382,8 @@
         </p:nvSpPr>
         <p:spPr>
           <a:xfrm>
-            <a:off x="2822266" y="4006524"/>
-            <a:ext cx="1828800" cy="457200"/>
+            <a:off x="1322558" y="2899801"/>
+            <a:ext cx="1828800" cy="212468"/>
           </a:xfrm>
           <a:prstGeom prst="rect">
             <a:avLst/>
@@ -4410,8 +4440,8 @@
         </p:blipFill>
         <p:spPr bwMode="auto">
           <a:xfrm>
-            <a:off x="9350314" y="993173"/>
-            <a:ext cx="1573863" cy="583497"/>
+            <a:off x="10914282" y="993176"/>
+            <a:ext cx="1573864" cy="583498"/>
           </a:xfrm>
           <a:prstGeom prst="rect">
             <a:avLst/>
@@ -4442,8 +4472,8 @@
         </p:nvSpPr>
         <p:spPr>
           <a:xfrm>
-            <a:off x="5939330" y="1983316"/>
-            <a:ext cx="3767493" cy="812322"/>
+            <a:off x="7503299" y="1983318"/>
+            <a:ext cx="3767494" cy="812322"/>
           </a:xfrm>
           <a:prstGeom prst="roundRect">
             <a:avLst/>
@@ -4458,6 +4488,13 @@
             <a:prstDash val="solid"/>
           </a:ln>
         </p:spPr>
+        <p:txBody>
+          <a:bodyPr/>
+          <a:lstStyle/>
+          <a:p>
+            <a:endParaRPr lang="ko-KR" altLang="en-US" dirty="0"/>
+          </a:p>
+        </p:txBody>
       </p:sp>
       <p:sp>
         <p:nvSpPr>
@@ -4473,8 +4510,8 @@
         </p:nvSpPr>
         <p:spPr>
           <a:xfrm>
-            <a:off x="6034160" y="2019187"/>
-            <a:ext cx="1815799" cy="227039"/>
+            <a:off x="7598128" y="2019189"/>
+            <a:ext cx="1815800" cy="227040"/>
           </a:xfrm>
           <a:prstGeom prst="rect">
             <a:avLst/>
@@ -4530,8 +4567,8 @@
         </p:blipFill>
         <p:spPr bwMode="auto">
           <a:xfrm>
-            <a:off x="7991633" y="2095091"/>
-            <a:ext cx="1573516" cy="519383"/>
+            <a:off x="9555600" y="2095093"/>
+            <a:ext cx="1573516" cy="519384"/>
           </a:xfrm>
           <a:prstGeom prst="rect">
             <a:avLst/>
@@ -4564,13 +4601,13 @@
         </p:nvCxnSpPr>
         <p:spPr>
           <a:xfrm>
-            <a:off x="3528408" y="1237127"/>
-            <a:ext cx="2266763" cy="0"/>
+            <a:off x="5092376" y="1237127"/>
+            <a:ext cx="2266764" cy="0"/>
           </a:xfrm>
           <a:prstGeom prst="straightConnector1">
             <a:avLst/>
           </a:prstGeom>
-          <a:ln>
+          <a:ln w="15875">
             <a:solidFill>
               <a:schemeClr val="tx1"/>
             </a:solidFill>
@@ -4607,7 +4644,7 @@
         </p:nvSpPr>
         <p:spPr>
           <a:xfrm>
-            <a:off x="3746389" y="871367"/>
+            <a:off x="5310356" y="871367"/>
             <a:ext cx="1828800" cy="457200"/>
           </a:xfrm>
           <a:prstGeom prst="rect">
@@ -4665,8 +4702,8 @@
         </p:blipFill>
         <p:spPr bwMode="auto">
           <a:xfrm>
-            <a:off x="10471066" y="3328188"/>
-            <a:ext cx="1573516" cy="519383"/>
+            <a:off x="12035032" y="3328191"/>
+            <a:ext cx="1573516" cy="519384"/>
           </a:xfrm>
           <a:prstGeom prst="rect">
             <a:avLst/>
@@ -4777,7 +4814,7 @@
         </p:blipFill>
         <p:spPr bwMode="auto">
           <a:xfrm>
-            <a:off x="10389144" y="4937498"/>
+            <a:off x="12063220" y="5879189"/>
             <a:ext cx="1737360" cy="885172"/>
           </a:xfrm>
           <a:prstGeom prst="rect">
@@ -4809,7 +4846,7 @@
         </p:nvSpPr>
         <p:spPr>
           <a:xfrm flipH="1" flipV="1">
-            <a:off x="10820723" y="4143375"/>
+            <a:off x="12494798" y="5085066"/>
             <a:ext cx="0" cy="559754"/>
           </a:xfrm>
           <a:prstGeom prst="line">
@@ -4839,8 +4876,8 @@
         </p:nvSpPr>
         <p:spPr>
           <a:xfrm flipH="1">
-            <a:off x="5162526" y="3611186"/>
-            <a:ext cx="1883747" cy="0"/>
+            <a:off x="6734422" y="3417903"/>
+            <a:ext cx="1883748" cy="0"/>
           </a:xfrm>
           <a:prstGeom prst="line">
             <a:avLst/>
@@ -4854,6 +4891,1403 @@
             <a:tailEnd type="triangle"/>
           </a:ln>
         </p:spPr>
+      </p:sp>
+      <p:sp>
+        <p:nvSpPr>
+          <p:cNvPr id="43" name="Shape 10">
+            <a:extLst>
+              <a:ext uri="{FF2B5EF4-FFF2-40B4-BE49-F238E27FC236}">
+                <a16:creationId xmlns:a16="http://schemas.microsoft.com/office/drawing/2014/main" id="{E27AB892-8018-D5F4-BE2A-AC8B2F130A0B}"/>
+              </a:ext>
+            </a:extLst>
+          </p:cNvPr>
+          <p:cNvSpPr/>
+          <p:nvPr/>
+        </p:nvSpPr>
+        <p:spPr>
+          <a:xfrm>
+            <a:off x="4964320" y="3816379"/>
+            <a:ext cx="1554480" cy="365760"/>
+          </a:xfrm>
+          <a:prstGeom prst="roundRect">
+            <a:avLst/>
+          </a:prstGeom>
+          <a:solidFill>
+            <a:srgbClr val="F8FAFC"/>
+          </a:solidFill>
+          <a:ln w="12700">
+            <a:solidFill>
+              <a:srgbClr val="1E293B"/>
+            </a:solidFill>
+            <a:prstDash val="solid"/>
+          </a:ln>
+        </p:spPr>
+        <p:txBody>
+          <a:bodyPr anchor="ctr"/>
+          <a:lstStyle/>
+          <a:p>
+            <a:pPr algn="ctr"/>
+            <a:r>
+              <a:rPr lang="en-US" altLang="ko-KR" sz="1000" b="1" dirty="0">
+                <a:latin typeface="Arial" panose="020B0604020202020204" pitchFamily="34" charset="0"/>
+                <a:cs typeface="Arial" panose="020B0604020202020204" pitchFamily="34" charset="0"/>
+              </a:rPr>
+              <a:t>Admin.js (Only Admin)</a:t>
+            </a:r>
+            <a:endParaRPr lang="ko-KR" altLang="en-US" sz="1000" b="1" dirty="0">
+              <a:latin typeface="Arial" panose="020B0604020202020204" pitchFamily="34" charset="0"/>
+              <a:cs typeface="Arial" panose="020B0604020202020204" pitchFamily="34" charset="0"/>
+            </a:endParaRPr>
+          </a:p>
+        </p:txBody>
+      </p:sp>
+      <p:sp>
+        <p:nvSpPr>
+          <p:cNvPr id="45" name="Shape 10">
+            <a:extLst>
+              <a:ext uri="{FF2B5EF4-FFF2-40B4-BE49-F238E27FC236}">
+                <a16:creationId xmlns:a16="http://schemas.microsoft.com/office/drawing/2014/main" id="{F49E14EA-F438-07FC-5EB6-FC68C8CE2BD1}"/>
+              </a:ext>
+            </a:extLst>
+          </p:cNvPr>
+          <p:cNvSpPr/>
+          <p:nvPr/>
+        </p:nvSpPr>
+        <p:spPr>
+          <a:xfrm>
+            <a:off x="4964320" y="4305964"/>
+            <a:ext cx="1554480" cy="501514"/>
+          </a:xfrm>
+          <a:prstGeom prst="roundRect">
+            <a:avLst/>
+          </a:prstGeom>
+          <a:solidFill>
+            <a:srgbClr val="F8FAFC"/>
+          </a:solidFill>
+          <a:ln w="12700">
+            <a:solidFill>
+              <a:srgbClr val="1E293B"/>
+            </a:solidFill>
+            <a:prstDash val="solid"/>
+          </a:ln>
+        </p:spPr>
+        <p:txBody>
+          <a:bodyPr anchor="ctr"/>
+          <a:lstStyle/>
+          <a:p>
+            <a:pPr algn="ctr"/>
+            <a:r>
+              <a:rPr lang="en-US" altLang="ko-KR" sz="1000" b="1" dirty="0">
+                <a:solidFill>
+                  <a:srgbClr val="FF0000"/>
+                </a:solidFill>
+                <a:latin typeface="Arial" panose="020B0604020202020204" pitchFamily="34" charset="0"/>
+                <a:cs typeface="Arial" panose="020B0604020202020204" pitchFamily="34" charset="0"/>
+              </a:rPr>
+              <a:t>Article.js (User)</a:t>
+            </a:r>
+          </a:p>
+          <a:p>
+            <a:pPr algn="ctr"/>
+            <a:r>
+              <a:rPr lang="en-US" altLang="ko-KR" sz="1000" b="1" dirty="0">
+                <a:solidFill>
+                  <a:srgbClr val="FF0000"/>
+                </a:solidFill>
+                <a:latin typeface="Arial" panose="020B0604020202020204" pitchFamily="34" charset="0"/>
+                <a:cs typeface="Arial" panose="020B0604020202020204" pitchFamily="34" charset="0"/>
+              </a:rPr>
+              <a:t>Article-view.js (User)</a:t>
+            </a:r>
+          </a:p>
+        </p:txBody>
+      </p:sp>
+      <p:cxnSp>
+        <p:nvCxnSpPr>
+          <p:cNvPr id="52" name="직선 화살표 연결선 51">
+            <a:extLst>
+              <a:ext uri="{FF2B5EF4-FFF2-40B4-BE49-F238E27FC236}">
+                <a16:creationId xmlns:a16="http://schemas.microsoft.com/office/drawing/2014/main" id="{8EAA79D5-2CAB-CDFB-C2CE-F8790171F10C}"/>
+              </a:ext>
+            </a:extLst>
+          </p:cNvPr>
+          <p:cNvCxnSpPr>
+            <a:cxnSpLocks/>
+          </p:cNvCxnSpPr>
+          <p:nvPr/>
+        </p:nvCxnSpPr>
+        <p:spPr>
+          <a:xfrm>
+            <a:off x="6734422" y="4015513"/>
+            <a:ext cx="1906780" cy="0"/>
+          </a:xfrm>
+          <a:prstGeom prst="straightConnector1">
+            <a:avLst/>
+          </a:prstGeom>
+          <a:ln w="15875">
+            <a:solidFill>
+              <a:schemeClr val="tx1"/>
+            </a:solidFill>
+            <a:headEnd type="triangle"/>
+            <a:tailEnd type="triangle"/>
+          </a:ln>
+        </p:spPr>
+        <p:style>
+          <a:lnRef idx="1">
+            <a:schemeClr val="accent1"/>
+          </a:lnRef>
+          <a:fillRef idx="0">
+            <a:schemeClr val="accent1"/>
+          </a:fillRef>
+          <a:effectRef idx="0">
+            <a:schemeClr val="accent1"/>
+          </a:effectRef>
+          <a:fontRef idx="minor">
+            <a:schemeClr val="tx1"/>
+          </a:fontRef>
+        </p:style>
+      </p:cxnSp>
+      <p:sp>
+        <p:nvSpPr>
+          <p:cNvPr id="56" name="Text 31">
+            <a:extLst>
+              <a:ext uri="{FF2B5EF4-FFF2-40B4-BE49-F238E27FC236}">
+                <a16:creationId xmlns:a16="http://schemas.microsoft.com/office/drawing/2014/main" id="{B4054A5E-8409-199D-A46C-852549354900}"/>
+              </a:ext>
+            </a:extLst>
+          </p:cNvPr>
+          <p:cNvSpPr/>
+          <p:nvPr/>
+        </p:nvSpPr>
+        <p:spPr>
+          <a:xfrm>
+            <a:off x="6619164" y="4077947"/>
+            <a:ext cx="2137292" cy="280048"/>
+          </a:xfrm>
+          <a:prstGeom prst="rect">
+            <a:avLst/>
+          </a:prstGeom>
+          <a:noFill/>
+          <a:ln/>
+        </p:spPr>
+        <p:txBody>
+          <a:bodyPr wrap="square" rtlCol="0" anchor="ctr"/>
+          <a:lstStyle/>
+          <a:p>
+            <a:pPr algn="ctr"/>
+            <a:r>
+              <a:rPr lang="en-US" sz="1000" b="1" dirty="0">
+                <a:solidFill>
+                  <a:srgbClr val="0F172A"/>
+                </a:solidFill>
+                <a:latin typeface="Arial" pitchFamily="34" charset="0"/>
+                <a:ea typeface="Arial" pitchFamily="34" charset="-122"/>
+                <a:cs typeface="Arial" pitchFamily="34" charset="-120"/>
+              </a:rPr>
+              <a:t>Admin Token (Authenticate)</a:t>
+            </a:r>
+          </a:p>
+          <a:p>
+            <a:pPr algn="ctr"/>
+            <a:r>
+              <a:rPr lang="en-US" sz="1000" b="1" dirty="0">
+                <a:solidFill>
+                  <a:srgbClr val="0F172A"/>
+                </a:solidFill>
+                <a:latin typeface="Arial" pitchFamily="34" charset="0"/>
+                <a:cs typeface="Arial" pitchFamily="34" charset="-120"/>
+              </a:rPr>
+              <a:t>CRUD </a:t>
+            </a:r>
+            <a:r>
+              <a:rPr lang="en-US" altLang="ko-KR" sz="1000" b="1" dirty="0">
+                <a:solidFill>
+                  <a:srgbClr val="0F172A"/>
+                </a:solidFill>
+                <a:latin typeface="Arial" pitchFamily="34" charset="0"/>
+                <a:cs typeface="Arial" pitchFamily="34" charset="-120"/>
+              </a:rPr>
+              <a:t>Articles </a:t>
+            </a:r>
+            <a:endParaRPr lang="en-US" sz="1000" dirty="0"/>
+          </a:p>
+        </p:txBody>
+      </p:sp>
+      <p:sp>
+        <p:nvSpPr>
+          <p:cNvPr id="58" name="TextBox 57">
+            <a:extLst>
+              <a:ext uri="{FF2B5EF4-FFF2-40B4-BE49-F238E27FC236}">
+                <a16:creationId xmlns:a16="http://schemas.microsoft.com/office/drawing/2014/main" id="{36F591C3-E575-8239-7482-53CAF51853EB}"/>
+              </a:ext>
+            </a:extLst>
+          </p:cNvPr>
+          <p:cNvSpPr txBox="1"/>
+          <p:nvPr/>
+        </p:nvSpPr>
+        <p:spPr>
+          <a:xfrm>
+            <a:off x="7592346" y="2210043"/>
+            <a:ext cx="1356632" cy="246221"/>
+          </a:xfrm>
+          <a:prstGeom prst="rect">
+            <a:avLst/>
+          </a:prstGeom>
+          <a:noFill/>
+        </p:spPr>
+        <p:txBody>
+          <a:bodyPr wrap="square">
+            <a:spAutoFit/>
+          </a:bodyPr>
+          <a:lstStyle/>
+          <a:p>
+            <a:r>
+              <a:rPr lang="en-US" altLang="ko-KR" sz="1000" dirty="0">
+                <a:solidFill>
+                  <a:srgbClr val="475569"/>
+                </a:solidFill>
+                <a:latin typeface="Arial" pitchFamily="34" charset="0"/>
+                <a:ea typeface="Arial" pitchFamily="34" charset="-122"/>
+                <a:cs typeface="Arial" pitchFamily="34" charset="-120"/>
+              </a:rPr>
+              <a:t>HTTPS Connection</a:t>
+            </a:r>
+            <a:endParaRPr lang="en-US" altLang="ko-KR" sz="1000" dirty="0"/>
+          </a:p>
+        </p:txBody>
+      </p:sp>
+      <p:pic>
+        <p:nvPicPr>
+          <p:cNvPr id="59" name="Picture 2" descr="Server PNG, 일러스트, PSD 및 클립 아트에 대한 무료 다운로드 | Pngtree">
+            <a:extLst>
+              <a:ext uri="{FF2B5EF4-FFF2-40B4-BE49-F238E27FC236}">
+                <a16:creationId xmlns:a16="http://schemas.microsoft.com/office/drawing/2014/main" id="{CF746296-E4E8-FFB1-8B76-5567DCAA5CB5}"/>
+              </a:ext>
+            </a:extLst>
+          </p:cNvPr>
+          <p:cNvPicPr>
+            <a:picLocks noChangeAspect="1" noChangeArrowheads="1"/>
+          </p:cNvPicPr>
+          <p:nvPr/>
+        </p:nvPicPr>
+        <p:blipFill>
+          <a:blip r:embed="rId7">
+            <a:extLst>
+              <a:ext uri="{BEBA8EAE-BF5A-486C-A8C5-ECC9F3942E4B}">
+                <a14:imgProps xmlns:a14="http://schemas.microsoft.com/office/drawing/2010/main">
+                  <a14:imgLayer r:embed="rId8">
+                    <a14:imgEffect>
+                      <a14:backgroundRemoval t="10000" b="90000" l="10000" r="90000"/>
+                    </a14:imgEffect>
+                  </a14:imgLayer>
+                </a14:imgProps>
+              </a:ext>
+              <a:ext uri="{28A0092B-C50C-407E-A947-70E740481C1C}">
+                <a14:useLocalDpi xmlns:a14="http://schemas.microsoft.com/office/drawing/2010/main" val="0"/>
+              </a:ext>
+            </a:extLst>
+          </a:blip>
+          <a:srcRect/>
+          <a:stretch>
+            <a:fillRect/>
+          </a:stretch>
+        </p:blipFill>
+        <p:spPr bwMode="auto">
+          <a:xfrm>
+            <a:off x="8884344" y="3902781"/>
+            <a:ext cx="987496" cy="987496"/>
+          </a:xfrm>
+          <a:prstGeom prst="rect">
+            <a:avLst/>
+          </a:prstGeom>
+          <a:noFill/>
+          <a:extLst>
+            <a:ext uri="{909E8E84-426E-40DD-AFC4-6F175D3DCCD1}">
+              <a14:hiddenFill xmlns:a14="http://schemas.microsoft.com/office/drawing/2010/main">
+                <a:solidFill>
+                  <a:srgbClr val="FFFFFF"/>
+                </a:solidFill>
+              </a14:hiddenFill>
+            </a:ext>
+          </a:extLst>
+        </p:spPr>
+      </p:pic>
+      <p:cxnSp>
+        <p:nvCxnSpPr>
+          <p:cNvPr id="60" name="직선 화살표 연결선 59">
+            <a:extLst>
+              <a:ext uri="{FF2B5EF4-FFF2-40B4-BE49-F238E27FC236}">
+                <a16:creationId xmlns:a16="http://schemas.microsoft.com/office/drawing/2014/main" id="{5BE322D2-9318-FDCB-B8C1-180396912635}"/>
+              </a:ext>
+            </a:extLst>
+          </p:cNvPr>
+          <p:cNvCxnSpPr>
+            <a:cxnSpLocks/>
+          </p:cNvCxnSpPr>
+          <p:nvPr/>
+        </p:nvCxnSpPr>
+        <p:spPr>
+          <a:xfrm>
+            <a:off x="6734422" y="4503735"/>
+            <a:ext cx="1906780" cy="0"/>
+          </a:xfrm>
+          <a:prstGeom prst="straightConnector1">
+            <a:avLst/>
+          </a:prstGeom>
+          <a:ln w="15875">
+            <a:solidFill>
+              <a:srgbClr val="FF0000"/>
+            </a:solidFill>
+            <a:headEnd type="triangle"/>
+            <a:tailEnd type="triangle"/>
+          </a:ln>
+        </p:spPr>
+        <p:style>
+          <a:lnRef idx="1">
+            <a:schemeClr val="accent1"/>
+          </a:lnRef>
+          <a:fillRef idx="0">
+            <a:schemeClr val="accent1"/>
+          </a:fillRef>
+          <a:effectRef idx="0">
+            <a:schemeClr val="accent1"/>
+          </a:effectRef>
+          <a:fontRef idx="minor">
+            <a:schemeClr val="tx1"/>
+          </a:fontRef>
+        </p:style>
+      </p:cxnSp>
+      <p:sp>
+        <p:nvSpPr>
+          <p:cNvPr id="61" name="Text 31">
+            <a:extLst>
+              <a:ext uri="{FF2B5EF4-FFF2-40B4-BE49-F238E27FC236}">
+                <a16:creationId xmlns:a16="http://schemas.microsoft.com/office/drawing/2014/main" id="{141C16E3-6691-2049-E969-A71C48CBF030}"/>
+              </a:ext>
+            </a:extLst>
+          </p:cNvPr>
+          <p:cNvSpPr/>
+          <p:nvPr/>
+        </p:nvSpPr>
+        <p:spPr>
+          <a:xfrm>
+            <a:off x="6658154" y="4527429"/>
+            <a:ext cx="2137292" cy="280048"/>
+          </a:xfrm>
+          <a:prstGeom prst="rect">
+            <a:avLst/>
+          </a:prstGeom>
+          <a:noFill/>
+          <a:ln/>
+        </p:spPr>
+        <p:txBody>
+          <a:bodyPr wrap="square" rtlCol="0" anchor="ctr"/>
+          <a:lstStyle/>
+          <a:p>
+            <a:pPr algn="ctr"/>
+            <a:r>
+              <a:rPr lang="en-US" sz="1000" b="1" dirty="0">
+                <a:solidFill>
+                  <a:srgbClr val="FF0000"/>
+                </a:solidFill>
+                <a:latin typeface="Arial" pitchFamily="34" charset="0"/>
+                <a:ea typeface="Arial" pitchFamily="34" charset="-122"/>
+                <a:cs typeface="Arial" pitchFamily="34" charset="-120"/>
+              </a:rPr>
+              <a:t>Read </a:t>
+            </a:r>
+            <a:r>
+              <a:rPr lang="en-US" altLang="ko-KR" sz="1000" b="1" dirty="0">
+                <a:solidFill>
+                  <a:srgbClr val="FF0000"/>
+                </a:solidFill>
+                <a:latin typeface="Arial" pitchFamily="34" charset="0"/>
+                <a:ea typeface="Arial" pitchFamily="34" charset="-122"/>
+                <a:cs typeface="Arial" pitchFamily="34" charset="-120"/>
+              </a:rPr>
+              <a:t>Articles </a:t>
+            </a:r>
+            <a:r>
+              <a:rPr lang="en-US" sz="1000" b="1" dirty="0">
+                <a:solidFill>
+                  <a:srgbClr val="FF0000"/>
+                </a:solidFill>
+                <a:latin typeface="Arial" pitchFamily="34" charset="0"/>
+                <a:ea typeface="Arial" pitchFamily="34" charset="-122"/>
+                <a:cs typeface="Arial" pitchFamily="34" charset="-120"/>
+              </a:rPr>
+              <a:t>using API</a:t>
+            </a:r>
+            <a:endParaRPr lang="en-US" sz="1000" dirty="0">
+              <a:solidFill>
+                <a:srgbClr val="FF0000"/>
+              </a:solidFill>
+            </a:endParaRPr>
+          </a:p>
+        </p:txBody>
+      </p:sp>
+      <p:sp>
+        <p:nvSpPr>
+          <p:cNvPr id="62" name="Shape 14">
+            <a:extLst>
+              <a:ext uri="{FF2B5EF4-FFF2-40B4-BE49-F238E27FC236}">
+                <a16:creationId xmlns:a16="http://schemas.microsoft.com/office/drawing/2014/main" id="{67B33B17-EBA3-9433-47D4-A5EA1C5168F5}"/>
+              </a:ext>
+            </a:extLst>
+          </p:cNvPr>
+          <p:cNvSpPr/>
+          <p:nvPr/>
+        </p:nvSpPr>
+        <p:spPr>
+          <a:xfrm>
+            <a:off x="14975188" y="3566759"/>
+            <a:ext cx="4455812" cy="1408748"/>
+          </a:xfrm>
+          <a:prstGeom prst="roundRect">
+            <a:avLst/>
+          </a:prstGeom>
+          <a:solidFill>
+            <a:srgbClr val="FFFFFF"/>
+          </a:solidFill>
+          <a:ln w="19050">
+            <a:solidFill>
+              <a:srgbClr val="1E293B"/>
+            </a:solidFill>
+            <a:prstDash val="solid"/>
+          </a:ln>
+        </p:spPr>
+        <p:txBody>
+          <a:bodyPr/>
+          <a:lstStyle/>
+          <a:p>
+            <a:endParaRPr lang="ko-KR" altLang="en-US" dirty="0"/>
+          </a:p>
+        </p:txBody>
+      </p:sp>
+      <p:pic>
+        <p:nvPicPr>
+          <p:cNvPr id="63" name="Picture 4" descr="Cloudflare - 나무위키">
+            <a:extLst>
+              <a:ext uri="{FF2B5EF4-FFF2-40B4-BE49-F238E27FC236}">
+                <a16:creationId xmlns:a16="http://schemas.microsoft.com/office/drawing/2014/main" id="{FB205DEF-1FEB-FF38-9C14-E6295FAB5E0D}"/>
+              </a:ext>
+            </a:extLst>
+          </p:cNvPr>
+          <p:cNvPicPr>
+            <a:picLocks noChangeAspect="1" noChangeArrowheads="1"/>
+          </p:cNvPicPr>
+          <p:nvPr/>
+        </p:nvPicPr>
+        <p:blipFill>
+          <a:blip r:embed="rId4">
+            <a:extLst>
+              <a:ext uri="{28A0092B-C50C-407E-A947-70E740481C1C}">
+                <a14:useLocalDpi xmlns:a14="http://schemas.microsoft.com/office/drawing/2010/main" val="0"/>
+              </a:ext>
+            </a:extLst>
+          </a:blip>
+          <a:srcRect/>
+          <a:stretch>
+            <a:fillRect/>
+          </a:stretch>
+        </p:blipFill>
+        <p:spPr bwMode="auto">
+          <a:xfrm>
+            <a:off x="17634804" y="3699673"/>
+            <a:ext cx="1573516" cy="519384"/>
+          </a:xfrm>
+          <a:prstGeom prst="rect">
+            <a:avLst/>
+          </a:prstGeom>
+          <a:noFill/>
+          <a:extLst>
+            <a:ext uri="{909E8E84-426E-40DD-AFC4-6F175D3DCCD1}">
+              <a14:hiddenFill xmlns:a14="http://schemas.microsoft.com/office/drawing/2010/main">
+                <a:solidFill>
+                  <a:srgbClr val="FFFFFF"/>
+                </a:solidFill>
+              </a14:hiddenFill>
+            </a:ext>
+          </a:extLst>
+        </p:spPr>
+      </p:pic>
+      <p:cxnSp>
+        <p:nvCxnSpPr>
+          <p:cNvPr id="1024" name="직선 화살표 연결선 1023">
+            <a:extLst>
+              <a:ext uri="{FF2B5EF4-FFF2-40B4-BE49-F238E27FC236}">
+                <a16:creationId xmlns:a16="http://schemas.microsoft.com/office/drawing/2014/main" id="{4AFB363C-37F7-21C3-A972-9CB222026CE0}"/>
+              </a:ext>
+            </a:extLst>
+          </p:cNvPr>
+          <p:cNvCxnSpPr>
+            <a:cxnSpLocks/>
+          </p:cNvCxnSpPr>
+          <p:nvPr/>
+        </p:nvCxnSpPr>
+        <p:spPr>
+          <a:xfrm>
+            <a:off x="13897223" y="4527429"/>
+            <a:ext cx="989070" cy="0"/>
+          </a:xfrm>
+          <a:prstGeom prst="straightConnector1">
+            <a:avLst/>
+          </a:prstGeom>
+          <a:ln w="15875">
+            <a:solidFill>
+              <a:srgbClr val="FF0000"/>
+            </a:solidFill>
+            <a:headEnd type="triangle"/>
+            <a:tailEnd type="triangle"/>
+          </a:ln>
+        </p:spPr>
+        <p:style>
+          <a:lnRef idx="1">
+            <a:schemeClr val="accent1"/>
+          </a:lnRef>
+          <a:fillRef idx="0">
+            <a:schemeClr val="accent1"/>
+          </a:fillRef>
+          <a:effectRef idx="0">
+            <a:schemeClr val="accent1"/>
+          </a:effectRef>
+          <a:fontRef idx="minor">
+            <a:schemeClr val="tx1"/>
+          </a:fontRef>
+        </p:style>
+      </p:cxnSp>
+      <p:sp>
+        <p:nvSpPr>
+          <p:cNvPr id="1027" name="Text 31">
+            <a:extLst>
+              <a:ext uri="{FF2B5EF4-FFF2-40B4-BE49-F238E27FC236}">
+                <a16:creationId xmlns:a16="http://schemas.microsoft.com/office/drawing/2014/main" id="{4C859E99-E8C9-9102-BBE1-2F32AC8562C9}"/>
+              </a:ext>
+            </a:extLst>
+          </p:cNvPr>
+          <p:cNvSpPr/>
+          <p:nvPr/>
+        </p:nvSpPr>
+        <p:spPr>
+          <a:xfrm>
+            <a:off x="13315632" y="4584338"/>
+            <a:ext cx="2137292" cy="519382"/>
+          </a:xfrm>
+          <a:prstGeom prst="rect">
+            <a:avLst/>
+          </a:prstGeom>
+          <a:noFill/>
+          <a:ln/>
+        </p:spPr>
+        <p:txBody>
+          <a:bodyPr wrap="square" rtlCol="0" anchor="ctr"/>
+          <a:lstStyle/>
+          <a:p>
+            <a:pPr algn="ctr"/>
+            <a:r>
+              <a:rPr lang="en-US" sz="1000" b="1" dirty="0">
+                <a:solidFill>
+                  <a:srgbClr val="FF0000"/>
+                </a:solidFill>
+                <a:latin typeface="Arial" pitchFamily="34" charset="0"/>
+                <a:ea typeface="Arial" pitchFamily="34" charset="-122"/>
+                <a:cs typeface="Arial" pitchFamily="34" charset="-120"/>
+              </a:rPr>
+              <a:t>Data Transfer</a:t>
+            </a:r>
+          </a:p>
+          <a:p>
+            <a:pPr algn="ctr"/>
+            <a:r>
+              <a:rPr lang="en-US" sz="1000" b="1" dirty="0">
+                <a:solidFill>
+                  <a:srgbClr val="FF0000"/>
+                </a:solidFill>
+                <a:latin typeface="Arial" pitchFamily="34" charset="0"/>
+                <a:ea typeface="Arial" pitchFamily="34" charset="-122"/>
+                <a:cs typeface="Arial" pitchFamily="34" charset="-120"/>
+              </a:rPr>
+              <a:t>Admin: CRUD</a:t>
+            </a:r>
+          </a:p>
+          <a:p>
+            <a:pPr algn="ctr"/>
+            <a:r>
+              <a:rPr lang="en-US" sz="1000" b="1" dirty="0">
+                <a:solidFill>
+                  <a:srgbClr val="FF0000"/>
+                </a:solidFill>
+                <a:latin typeface="Arial" pitchFamily="34" charset="0"/>
+                <a:ea typeface="Arial" pitchFamily="34" charset="-122"/>
+                <a:cs typeface="Arial" pitchFamily="34" charset="-120"/>
+              </a:rPr>
+              <a:t>User: R</a:t>
+            </a:r>
+          </a:p>
+        </p:txBody>
+      </p:sp>
+      <p:sp>
+        <p:nvSpPr>
+          <p:cNvPr id="1033" name="TextBox 1032">
+            <a:extLst>
+              <a:ext uri="{FF2B5EF4-FFF2-40B4-BE49-F238E27FC236}">
+                <a16:creationId xmlns:a16="http://schemas.microsoft.com/office/drawing/2014/main" id="{0D15D22A-E272-A3A0-CE95-DE55A8933FB8}"/>
+              </a:ext>
+            </a:extLst>
+          </p:cNvPr>
+          <p:cNvSpPr txBox="1"/>
+          <p:nvPr/>
+        </p:nvSpPr>
+        <p:spPr>
+          <a:xfrm>
+            <a:off x="15039009" y="3623198"/>
+            <a:ext cx="8997950" cy="423193"/>
+          </a:xfrm>
+          <a:prstGeom prst="rect">
+            <a:avLst/>
+          </a:prstGeom>
+          <a:noFill/>
+        </p:spPr>
+        <p:txBody>
+          <a:bodyPr wrap="square">
+            <a:spAutoFit/>
+          </a:bodyPr>
+          <a:lstStyle/>
+          <a:p>
+            <a:r>
+              <a:rPr lang="en-US" altLang="ko-KR" sz="1150" b="1" dirty="0">
+                <a:solidFill>
+                  <a:srgbClr val="0F172A"/>
+                </a:solidFill>
+                <a:latin typeface="Arial" pitchFamily="34" charset="0"/>
+                <a:ea typeface="Arial" pitchFamily="34" charset="-122"/>
+                <a:cs typeface="Arial" pitchFamily="34" charset="-120"/>
+              </a:rPr>
+              <a:t>CLOUDFLARE D1 Database</a:t>
+            </a:r>
+            <a:r>
+              <a:rPr lang="en-US" altLang="ko-KR" sz="1000" b="1" dirty="0">
+                <a:solidFill>
+                  <a:srgbClr val="0F172A"/>
+                </a:solidFill>
+                <a:latin typeface="Arial" pitchFamily="34" charset="0"/>
+                <a:ea typeface="Arial" pitchFamily="34" charset="-122"/>
+                <a:cs typeface="Arial" pitchFamily="34" charset="-120"/>
+              </a:rPr>
+              <a:t>
+</a:t>
+            </a:r>
+            <a:r>
+              <a:rPr lang="en-US" altLang="ko-KR" sz="1000" dirty="0">
+                <a:solidFill>
+                  <a:srgbClr val="475569"/>
+                </a:solidFill>
+                <a:latin typeface="Arial" pitchFamily="34" charset="0"/>
+                <a:cs typeface="Arial" pitchFamily="34" charset="-120"/>
+              </a:rPr>
+              <a:t>Storing Articles</a:t>
+            </a:r>
+            <a:endParaRPr lang="en-US" altLang="ko-KR" sz="1000" dirty="0"/>
+          </a:p>
+        </p:txBody>
+      </p:sp>
+      <p:pic>
+        <p:nvPicPr>
+          <p:cNvPr id="1035" name="Picture 6" descr="Database - Free seo and web icons">
+            <a:extLst>
+              <a:ext uri="{FF2B5EF4-FFF2-40B4-BE49-F238E27FC236}">
+                <a16:creationId xmlns:a16="http://schemas.microsoft.com/office/drawing/2014/main" id="{87002573-172B-2AE3-BAF0-7D2355D8F240}"/>
+              </a:ext>
+            </a:extLst>
+          </p:cNvPr>
+          <p:cNvPicPr>
+            <a:picLocks noChangeAspect="1" noChangeArrowheads="1"/>
+          </p:cNvPicPr>
+          <p:nvPr/>
+        </p:nvPicPr>
+        <p:blipFill>
+          <a:blip r:embed="rId9">
+            <a:extLst>
+              <a:ext uri="{28A0092B-C50C-407E-A947-70E740481C1C}">
+                <a14:useLocalDpi xmlns:a14="http://schemas.microsoft.com/office/drawing/2010/main" val="0"/>
+              </a:ext>
+            </a:extLst>
+          </a:blip>
+          <a:srcRect/>
+          <a:stretch>
+            <a:fillRect/>
+          </a:stretch>
+        </p:blipFill>
+        <p:spPr bwMode="auto">
+          <a:xfrm>
+            <a:off x="15201881" y="4082728"/>
+            <a:ext cx="724750" cy="724750"/>
+          </a:xfrm>
+          <a:prstGeom prst="rect">
+            <a:avLst/>
+          </a:prstGeom>
+          <a:noFill/>
+          <a:extLst>
+            <a:ext uri="{909E8E84-426E-40DD-AFC4-6F175D3DCCD1}">
+              <a14:hiddenFill xmlns:a14="http://schemas.microsoft.com/office/drawing/2010/main">
+                <a:solidFill>
+                  <a:srgbClr val="FFFFFF"/>
+                </a:solidFill>
+              </a14:hiddenFill>
+            </a:ext>
+          </a:extLst>
+        </p:spPr>
+      </p:pic>
+      <p:grpSp>
+        <p:nvGrpSpPr>
+          <p:cNvPr id="1036" name="그룹 1035">
+            <a:extLst>
+              <a:ext uri="{FF2B5EF4-FFF2-40B4-BE49-F238E27FC236}">
+                <a16:creationId xmlns:a16="http://schemas.microsoft.com/office/drawing/2014/main" id="{70A04A57-8AD5-744F-49D3-C67F70F3CAE6}"/>
+              </a:ext>
+            </a:extLst>
+          </p:cNvPr>
+          <p:cNvGrpSpPr/>
+          <p:nvPr/>
+        </p:nvGrpSpPr>
+        <p:grpSpPr>
+          <a:xfrm>
+            <a:off x="278556" y="1622366"/>
+            <a:ext cx="1329704" cy="1411942"/>
+            <a:chOff x="5244279" y="4561382"/>
+            <a:chExt cx="1329704" cy="1411941"/>
+          </a:xfrm>
+        </p:grpSpPr>
+        <p:sp>
+          <p:nvSpPr>
+            <p:cNvPr id="1037" name="Shape 18">
+              <a:extLst>
+                <a:ext uri="{FF2B5EF4-FFF2-40B4-BE49-F238E27FC236}">
+                  <a16:creationId xmlns:a16="http://schemas.microsoft.com/office/drawing/2014/main" id="{C5709FBC-2A64-C8C5-B90E-5FF668E82CD1}"/>
+                </a:ext>
+              </a:extLst>
+            </p:cNvPr>
+            <p:cNvSpPr/>
+            <p:nvPr/>
+          </p:nvSpPr>
+          <p:spPr>
+            <a:xfrm>
+              <a:off x="5244279" y="4561382"/>
+              <a:ext cx="1329704" cy="1411941"/>
+            </a:xfrm>
+            <a:prstGeom prst="roundRect">
+              <a:avLst/>
+            </a:prstGeom>
+            <a:solidFill>
+              <a:srgbClr val="FFFFFF"/>
+            </a:solidFill>
+            <a:ln w="19050">
+              <a:solidFill>
+                <a:srgbClr val="94A3B8"/>
+              </a:solidFill>
+              <a:prstDash val="solid"/>
+            </a:ln>
+          </p:spPr>
+        </p:sp>
+        <p:sp>
+          <p:nvSpPr>
+            <p:cNvPr id="1038" name="Shape 19">
+              <a:extLst>
+                <a:ext uri="{FF2B5EF4-FFF2-40B4-BE49-F238E27FC236}">
+                  <a16:creationId xmlns:a16="http://schemas.microsoft.com/office/drawing/2014/main" id="{911ADDDB-67B4-E9FF-E6F6-3F55223F5364}"/>
+                </a:ext>
+              </a:extLst>
+            </p:cNvPr>
+            <p:cNvSpPr/>
+            <p:nvPr/>
+          </p:nvSpPr>
+          <p:spPr>
+            <a:xfrm>
+              <a:off x="5726250" y="4607097"/>
+              <a:ext cx="365760" cy="45720"/>
+            </a:xfrm>
+            <a:prstGeom prst="roundRect">
+              <a:avLst/>
+            </a:prstGeom>
+            <a:solidFill>
+              <a:srgbClr val="E2E8F0"/>
+            </a:solidFill>
+            <a:ln/>
+          </p:spPr>
+        </p:sp>
+        <p:sp>
+          <p:nvSpPr>
+            <p:cNvPr id="1039" name="Shape 20">
+              <a:extLst>
+                <a:ext uri="{FF2B5EF4-FFF2-40B4-BE49-F238E27FC236}">
+                  <a16:creationId xmlns:a16="http://schemas.microsoft.com/office/drawing/2014/main" id="{08DE8E13-AB22-B23D-2C93-17F2A745DFE9}"/>
+                </a:ext>
+              </a:extLst>
+            </p:cNvPr>
+            <p:cNvSpPr/>
+            <p:nvPr/>
+          </p:nvSpPr>
+          <p:spPr>
+            <a:xfrm>
+              <a:off x="5335719" y="4744257"/>
+              <a:ext cx="963944" cy="182880"/>
+            </a:xfrm>
+            <a:prstGeom prst="roundRect">
+              <a:avLst/>
+            </a:prstGeom>
+            <a:solidFill>
+              <a:srgbClr val="F1F5F9"/>
+            </a:solidFill>
+            <a:ln/>
+          </p:spPr>
+        </p:sp>
+        <p:sp>
+          <p:nvSpPr>
+            <p:cNvPr id="1040" name="Shape 21">
+              <a:extLst>
+                <a:ext uri="{FF2B5EF4-FFF2-40B4-BE49-F238E27FC236}">
+                  <a16:creationId xmlns:a16="http://schemas.microsoft.com/office/drawing/2014/main" id="{4D65580E-7F56-5A41-B182-AAA2219BDEF2}"/>
+                </a:ext>
+              </a:extLst>
+            </p:cNvPr>
+            <p:cNvSpPr/>
+            <p:nvPr/>
+          </p:nvSpPr>
+          <p:spPr>
+            <a:xfrm>
+              <a:off x="5518599" y="4972857"/>
+              <a:ext cx="963944" cy="182880"/>
+            </a:xfrm>
+            <a:prstGeom prst="roundRect">
+              <a:avLst/>
+            </a:prstGeom>
+            <a:solidFill>
+              <a:srgbClr val="0284C7"/>
+            </a:solidFill>
+            <a:ln/>
+          </p:spPr>
+        </p:sp>
+      </p:grpSp>
+      <p:sp>
+        <p:nvSpPr>
+          <p:cNvPr id="1046" name="TextBox 1045">
+            <a:extLst>
+              <a:ext uri="{FF2B5EF4-FFF2-40B4-BE49-F238E27FC236}">
+                <a16:creationId xmlns:a16="http://schemas.microsoft.com/office/drawing/2014/main" id="{3EF71D17-2626-188E-B712-72630AD6D911}"/>
+              </a:ext>
+            </a:extLst>
+          </p:cNvPr>
+          <p:cNvSpPr txBox="1"/>
+          <p:nvPr/>
+        </p:nvSpPr>
+        <p:spPr>
+          <a:xfrm>
+            <a:off x="459979" y="1342173"/>
+            <a:ext cx="966858" cy="246221"/>
+          </a:xfrm>
+          <a:prstGeom prst="rect">
+            <a:avLst/>
+          </a:prstGeom>
+          <a:noFill/>
+        </p:spPr>
+        <p:txBody>
+          <a:bodyPr wrap="square">
+            <a:spAutoFit/>
+          </a:bodyPr>
+          <a:lstStyle/>
+          <a:p>
+            <a:pPr algn="ctr"/>
+            <a:r>
+              <a:rPr lang="en-US" altLang="ko-KR" sz="1000" b="1" dirty="0">
+                <a:solidFill>
+                  <a:srgbClr val="0F172A"/>
+                </a:solidFill>
+                <a:latin typeface="Arial" pitchFamily="34" charset="0"/>
+                <a:cs typeface="Arial" pitchFamily="34" charset="-120"/>
+              </a:rPr>
+              <a:t>Index.html</a:t>
+            </a:r>
+            <a:endParaRPr lang="en-US" altLang="ko-KR" sz="1000" dirty="0"/>
+          </a:p>
+        </p:txBody>
+      </p:sp>
+      <p:sp>
+        <p:nvSpPr>
+          <p:cNvPr id="1047" name="TextBox 1046">
+            <a:extLst>
+              <a:ext uri="{FF2B5EF4-FFF2-40B4-BE49-F238E27FC236}">
+                <a16:creationId xmlns:a16="http://schemas.microsoft.com/office/drawing/2014/main" id="{0D228F3E-EC68-1F6E-128E-23F83843A252}"/>
+              </a:ext>
+            </a:extLst>
+          </p:cNvPr>
+          <p:cNvSpPr txBox="1"/>
+          <p:nvPr/>
+        </p:nvSpPr>
+        <p:spPr>
+          <a:xfrm>
+            <a:off x="479335" y="3190232"/>
+            <a:ext cx="966858" cy="400110"/>
+          </a:xfrm>
+          <a:prstGeom prst="rect">
+            <a:avLst/>
+          </a:prstGeom>
+          <a:noFill/>
+        </p:spPr>
+        <p:txBody>
+          <a:bodyPr wrap="square">
+            <a:spAutoFit/>
+          </a:bodyPr>
+          <a:lstStyle/>
+          <a:p>
+            <a:pPr algn="ctr"/>
+            <a:r>
+              <a:rPr lang="en-US" altLang="ko-KR" sz="1000" b="1" dirty="0">
+                <a:solidFill>
+                  <a:srgbClr val="0F172A"/>
+                </a:solidFill>
+                <a:latin typeface="Arial" pitchFamily="34" charset="0"/>
+                <a:cs typeface="Arial" pitchFamily="34" charset="-120"/>
+              </a:rPr>
+              <a:t>Admin Page</a:t>
+            </a:r>
+          </a:p>
+          <a:p>
+            <a:pPr algn="ctr"/>
+            <a:r>
+              <a:rPr lang="en-US" altLang="ko-KR" sz="1000" b="1" dirty="0">
+                <a:solidFill>
+                  <a:srgbClr val="0F172A"/>
+                </a:solidFill>
+                <a:latin typeface="Arial" pitchFamily="34" charset="0"/>
+                <a:cs typeface="Arial" pitchFamily="34" charset="-120"/>
+              </a:rPr>
+              <a:t>(Secret)</a:t>
+            </a:r>
+            <a:endParaRPr lang="en-US" altLang="ko-KR" sz="1000" dirty="0"/>
+          </a:p>
+        </p:txBody>
+      </p:sp>
+      <p:sp>
+        <p:nvSpPr>
+          <p:cNvPr id="1049" name="TextBox 1048">
+            <a:extLst>
+              <a:ext uri="{FF2B5EF4-FFF2-40B4-BE49-F238E27FC236}">
+                <a16:creationId xmlns:a16="http://schemas.microsoft.com/office/drawing/2014/main" id="{3CED4BCC-842E-F391-2633-16E1EAC91783}"/>
+              </a:ext>
+            </a:extLst>
+          </p:cNvPr>
+          <p:cNvSpPr txBox="1"/>
+          <p:nvPr/>
+        </p:nvSpPr>
+        <p:spPr>
+          <a:xfrm>
+            <a:off x="143402" y="6867567"/>
+            <a:ext cx="7999112" cy="3754874"/>
+          </a:xfrm>
+          <a:prstGeom prst="rect">
+            <a:avLst/>
+          </a:prstGeom>
+          <a:noFill/>
+        </p:spPr>
+        <p:txBody>
+          <a:bodyPr wrap="square">
+            <a:spAutoFit/>
+          </a:bodyPr>
+          <a:lstStyle/>
+          <a:p>
+            <a:r>
+              <a:rPr lang="en-US" altLang="ko-KR" sz="1400" b="1" dirty="0"/>
+              <a:t>&lt;Admin&gt;</a:t>
+            </a:r>
+          </a:p>
+          <a:p>
+            <a:r>
+              <a:rPr lang="en-US" altLang="ko-KR" sz="1400" dirty="0"/>
+              <a:t>1. </a:t>
+            </a:r>
+            <a:r>
+              <a:rPr lang="ko-KR" altLang="en-US" sz="1400" dirty="0" err="1"/>
+              <a:t>Admin</a:t>
+            </a:r>
+            <a:r>
+              <a:rPr lang="ko-KR" altLang="en-US" sz="1400" dirty="0"/>
+              <a:t> </a:t>
+            </a:r>
+            <a:r>
+              <a:rPr lang="ko-KR" altLang="en-US" sz="1400" dirty="0" err="1"/>
+              <a:t>logs</a:t>
+            </a:r>
+            <a:r>
+              <a:rPr lang="ko-KR" altLang="en-US" sz="1400" dirty="0"/>
+              <a:t> </a:t>
+            </a:r>
+            <a:r>
+              <a:rPr lang="ko-KR" altLang="en-US" sz="1400" dirty="0" err="1"/>
+              <a:t>in</a:t>
+            </a:r>
+            <a:r>
+              <a:rPr lang="ko-KR" altLang="en-US" sz="1400" dirty="0"/>
+              <a:t> </a:t>
+            </a:r>
+            <a:r>
+              <a:rPr lang="ko-KR" altLang="en-US" sz="1400" dirty="0" err="1"/>
+              <a:t>via</a:t>
+            </a:r>
+            <a:r>
+              <a:rPr lang="ko-KR" altLang="en-US" sz="1400" dirty="0"/>
+              <a:t> admin.html </a:t>
+            </a:r>
+            <a:r>
+              <a:rPr lang="ko-KR" altLang="en-US" sz="1400" dirty="0" err="1"/>
+              <a:t>using</a:t>
+            </a:r>
+            <a:r>
+              <a:rPr lang="ko-KR" altLang="en-US" sz="1400" dirty="0"/>
+              <a:t> </a:t>
+            </a:r>
+            <a:r>
+              <a:rPr lang="ko-KR" altLang="en-US" sz="1400" dirty="0" err="1"/>
+              <a:t>a</a:t>
+            </a:r>
+            <a:r>
+              <a:rPr lang="ko-KR" altLang="en-US" sz="1400" dirty="0"/>
+              <a:t> </a:t>
+            </a:r>
+            <a:r>
+              <a:rPr lang="ko-KR" altLang="en-US" sz="1400" dirty="0" err="1"/>
+              <a:t>token-based</a:t>
+            </a:r>
+            <a:r>
+              <a:rPr lang="ko-KR" altLang="en-US" sz="1400" dirty="0"/>
+              <a:t> </a:t>
+            </a:r>
+            <a:r>
+              <a:rPr lang="ko-KR" altLang="en-US" sz="1400" dirty="0" err="1"/>
+              <a:t>authentication</a:t>
+            </a:r>
+            <a:r>
+              <a:rPr lang="ko-KR" altLang="en-US" sz="1400" dirty="0"/>
+              <a:t>.</a:t>
+            </a:r>
+          </a:p>
+          <a:p>
+            <a:r>
+              <a:rPr lang="en-US" altLang="ko-KR" sz="1400" dirty="0"/>
+              <a:t>2. </a:t>
+            </a:r>
+            <a:r>
+              <a:rPr lang="ko-KR" altLang="en-US" sz="1400" dirty="0"/>
+              <a:t>admin.js </a:t>
+            </a:r>
+            <a:r>
+              <a:rPr lang="ko-KR" altLang="en-US" sz="1400" dirty="0" err="1"/>
+              <a:t>sends</a:t>
+            </a:r>
+            <a:r>
+              <a:rPr lang="ko-KR" altLang="en-US" sz="1400" dirty="0"/>
+              <a:t> HTTP </a:t>
+            </a:r>
+            <a:r>
+              <a:rPr lang="ko-KR" altLang="en-US" sz="1400" dirty="0" err="1"/>
+              <a:t>requests</a:t>
+            </a:r>
+            <a:r>
+              <a:rPr lang="ko-KR" altLang="en-US" sz="1400" dirty="0"/>
+              <a:t> (POST/PUT/DELETE) </a:t>
+            </a:r>
+            <a:r>
+              <a:rPr lang="ko-KR" altLang="en-US" sz="1400" dirty="0" err="1"/>
+              <a:t>with</a:t>
+            </a:r>
+            <a:r>
+              <a:rPr lang="ko-KR" altLang="en-US" sz="1400" dirty="0"/>
+              <a:t> </a:t>
+            </a:r>
+            <a:r>
+              <a:rPr lang="ko-KR" altLang="en-US" sz="1400" dirty="0" err="1"/>
+              <a:t>an</a:t>
+            </a:r>
+            <a:r>
+              <a:rPr lang="ko-KR" altLang="en-US" sz="1400" dirty="0"/>
+              <a:t> </a:t>
+            </a:r>
+            <a:r>
+              <a:rPr lang="ko-KR" altLang="en-US" sz="1400" dirty="0" err="1"/>
+              <a:t>Authorization</a:t>
+            </a:r>
+            <a:r>
+              <a:rPr lang="ko-KR" altLang="en-US" sz="1400" dirty="0"/>
+              <a:t> </a:t>
+            </a:r>
+            <a:r>
+              <a:rPr lang="ko-KR" altLang="en-US" sz="1400" dirty="0" err="1"/>
+              <a:t>header</a:t>
+            </a:r>
+            <a:r>
+              <a:rPr lang="ko-KR" altLang="en-US" sz="1400" dirty="0"/>
+              <a:t> </a:t>
+            </a:r>
+            <a:r>
+              <a:rPr lang="ko-KR" altLang="en-US" sz="1400" dirty="0" err="1"/>
+              <a:t>to</a:t>
+            </a:r>
+            <a:r>
+              <a:rPr lang="ko-KR" altLang="en-US" sz="1400" dirty="0"/>
+              <a:t> </a:t>
+            </a:r>
+            <a:r>
+              <a:rPr lang="ko-KR" altLang="en-US" sz="1400" dirty="0" err="1"/>
+              <a:t>Cloudflare</a:t>
+            </a:r>
+            <a:r>
+              <a:rPr lang="ko-KR" altLang="en-US" sz="1400" dirty="0"/>
+              <a:t> </a:t>
+            </a:r>
+            <a:r>
+              <a:rPr lang="ko-KR" altLang="en-US" sz="1400" dirty="0" err="1"/>
+              <a:t>Worker</a:t>
+            </a:r>
+            <a:r>
+              <a:rPr lang="ko-KR" altLang="en-US" sz="1400" dirty="0"/>
+              <a:t>.</a:t>
+            </a:r>
+          </a:p>
+          <a:p>
+            <a:r>
+              <a:rPr lang="en-US" altLang="ko-KR" sz="1400" dirty="0"/>
+              <a:t>3. </a:t>
+            </a:r>
+            <a:r>
+              <a:rPr lang="ko-KR" altLang="en-US" sz="1400" dirty="0"/>
+              <a:t>The </a:t>
+            </a:r>
+            <a:r>
+              <a:rPr lang="ko-KR" altLang="en-US" sz="1400" dirty="0" err="1"/>
+              <a:t>Worker</a:t>
+            </a:r>
+            <a:r>
+              <a:rPr lang="ko-KR" altLang="en-US" sz="1400" dirty="0"/>
+              <a:t> </a:t>
+            </a:r>
+            <a:r>
+              <a:rPr lang="ko-KR" altLang="en-US" sz="1400" dirty="0" err="1"/>
+              <a:t>validates</a:t>
+            </a:r>
+            <a:r>
+              <a:rPr lang="ko-KR" altLang="en-US" sz="1400" dirty="0"/>
+              <a:t> </a:t>
+            </a:r>
+            <a:r>
+              <a:rPr lang="ko-KR" altLang="en-US" sz="1400" dirty="0" err="1"/>
+              <a:t>the</a:t>
+            </a:r>
+            <a:r>
+              <a:rPr lang="ko-KR" altLang="en-US" sz="1400" dirty="0"/>
+              <a:t> </a:t>
+            </a:r>
+            <a:r>
+              <a:rPr lang="ko-KR" altLang="en-US" sz="1400" dirty="0" err="1"/>
+              <a:t>admin</a:t>
+            </a:r>
+            <a:r>
+              <a:rPr lang="ko-KR" altLang="en-US" sz="1400" dirty="0"/>
+              <a:t> </a:t>
+            </a:r>
+            <a:r>
+              <a:rPr lang="ko-KR" altLang="en-US" sz="1400" dirty="0" err="1"/>
+              <a:t>token</a:t>
+            </a:r>
+            <a:r>
+              <a:rPr lang="ko-KR" altLang="en-US" sz="1400" dirty="0"/>
+              <a:t> and </a:t>
+            </a:r>
+            <a:r>
+              <a:rPr lang="ko-KR" altLang="en-US" sz="1400" dirty="0" err="1"/>
+              <a:t>processes</a:t>
+            </a:r>
+            <a:r>
+              <a:rPr lang="ko-KR" altLang="en-US" sz="1400" dirty="0"/>
+              <a:t> </a:t>
+            </a:r>
+            <a:r>
+              <a:rPr lang="ko-KR" altLang="en-US" sz="1400" dirty="0" err="1"/>
+              <a:t>the</a:t>
+            </a:r>
+            <a:r>
+              <a:rPr lang="ko-KR" altLang="en-US" sz="1400" dirty="0"/>
+              <a:t> </a:t>
+            </a:r>
+            <a:r>
+              <a:rPr lang="ko-KR" altLang="en-US" sz="1400" dirty="0" err="1"/>
+              <a:t>request</a:t>
+            </a:r>
+            <a:r>
+              <a:rPr lang="ko-KR" altLang="en-US" sz="1400" dirty="0"/>
+              <a:t>.</a:t>
+            </a:r>
+          </a:p>
+          <a:p>
+            <a:r>
+              <a:rPr lang="en-US" altLang="ko-KR" sz="1400" dirty="0"/>
+              <a:t>4. </a:t>
+            </a:r>
+            <a:r>
+              <a:rPr lang="ko-KR" altLang="en-US" sz="1400" dirty="0" err="1"/>
+              <a:t>Validated</a:t>
+            </a:r>
+            <a:r>
+              <a:rPr lang="ko-KR" altLang="en-US" sz="1400" dirty="0"/>
+              <a:t> </a:t>
+            </a:r>
+            <a:r>
+              <a:rPr lang="ko-KR" altLang="en-US" sz="1400" dirty="0" err="1"/>
+              <a:t>data</a:t>
+            </a:r>
+            <a:r>
+              <a:rPr lang="ko-KR" altLang="en-US" sz="1400" dirty="0"/>
+              <a:t> </a:t>
+            </a:r>
+            <a:r>
+              <a:rPr lang="ko-KR" altLang="en-US" sz="1400" dirty="0" err="1"/>
+              <a:t>is</a:t>
+            </a:r>
+            <a:r>
+              <a:rPr lang="ko-KR" altLang="en-US" sz="1400" dirty="0"/>
+              <a:t> </a:t>
+            </a:r>
+            <a:r>
+              <a:rPr lang="ko-KR" altLang="en-US" sz="1400" dirty="0" err="1"/>
+              <a:t>stored</a:t>
+            </a:r>
+            <a:r>
+              <a:rPr lang="ko-KR" altLang="en-US" sz="1400" dirty="0"/>
+              <a:t> </a:t>
+            </a:r>
+            <a:r>
+              <a:rPr lang="ko-KR" altLang="en-US" sz="1400" dirty="0" err="1"/>
+              <a:t>or</a:t>
+            </a:r>
+            <a:r>
+              <a:rPr lang="ko-KR" altLang="en-US" sz="1400" dirty="0"/>
+              <a:t> </a:t>
+            </a:r>
+            <a:r>
+              <a:rPr lang="ko-KR" altLang="en-US" sz="1400" dirty="0" err="1"/>
+              <a:t>modified</a:t>
+            </a:r>
+            <a:r>
+              <a:rPr lang="ko-KR" altLang="en-US" sz="1400" dirty="0"/>
+              <a:t> </a:t>
+            </a:r>
+            <a:r>
+              <a:rPr lang="ko-KR" altLang="en-US" sz="1400" dirty="0" err="1"/>
+              <a:t>in</a:t>
+            </a:r>
+            <a:r>
+              <a:rPr lang="ko-KR" altLang="en-US" sz="1400" dirty="0"/>
+              <a:t> </a:t>
+            </a:r>
+            <a:r>
+              <a:rPr lang="ko-KR" altLang="en-US" sz="1400" dirty="0" err="1"/>
+              <a:t>the</a:t>
+            </a:r>
+            <a:r>
+              <a:rPr lang="ko-KR" altLang="en-US" sz="1400" dirty="0"/>
+              <a:t> D1 </a:t>
+            </a:r>
+            <a:r>
+              <a:rPr lang="ko-KR" altLang="en-US" sz="1400" dirty="0" err="1"/>
+              <a:t>database</a:t>
+            </a:r>
+            <a:r>
+              <a:rPr lang="ko-KR" altLang="en-US" sz="1400" dirty="0"/>
+              <a:t> (</a:t>
+            </a:r>
+            <a:r>
+              <a:rPr lang="ko-KR" altLang="en-US" sz="1400" dirty="0" err="1"/>
+              <a:t>articles</a:t>
+            </a:r>
+            <a:r>
+              <a:rPr lang="ko-KR" altLang="en-US" sz="1400" dirty="0"/>
+              <a:t> </a:t>
+            </a:r>
+            <a:r>
+              <a:rPr lang="ko-KR" altLang="en-US" sz="1400" dirty="0" err="1"/>
+              <a:t>table</a:t>
+            </a:r>
+            <a:r>
+              <a:rPr lang="ko-KR" altLang="en-US" sz="1400" dirty="0"/>
+              <a:t>).</a:t>
+            </a:r>
+            <a:endParaRPr lang="en-US" altLang="ko-KR" sz="1400" dirty="0"/>
+          </a:p>
+          <a:p>
+            <a:endParaRPr lang="en-US" altLang="ko-KR" sz="1400" dirty="0"/>
+          </a:p>
+          <a:p>
+            <a:r>
+              <a:rPr lang="en-US" altLang="ko-KR" sz="1400" b="1" dirty="0"/>
+              <a:t>&lt;User Flow1&gt;</a:t>
+            </a:r>
+          </a:p>
+          <a:p>
+            <a:r>
+              <a:rPr lang="en-US" altLang="ko-KR" sz="1400" dirty="0"/>
+              <a:t>1. Users access article.html to view posts.</a:t>
+            </a:r>
+          </a:p>
+          <a:p>
+            <a:r>
+              <a:rPr lang="en-US" altLang="ko-KR" sz="1400" dirty="0"/>
+              <a:t>2. article.js sends a GET request to Cloudflare Worker.</a:t>
+            </a:r>
+          </a:p>
+          <a:p>
+            <a:r>
+              <a:rPr lang="en-US" altLang="ko-KR" sz="1400" dirty="0"/>
+              <a:t>3. The Worker retrieves data from the D1 database (articles table).</a:t>
+            </a:r>
+          </a:p>
+          <a:p>
+            <a:r>
+              <a:rPr lang="en-US" altLang="ko-KR" sz="1400" dirty="0"/>
+              <a:t>4. The response is returned as JSON and rendered on the frontend.</a:t>
+            </a:r>
+          </a:p>
+          <a:p>
+            <a:endParaRPr lang="en-US" altLang="ko-KR" sz="1400" b="1" dirty="0"/>
+          </a:p>
+          <a:p>
+            <a:r>
+              <a:rPr lang="en-US" altLang="ko-KR" sz="1400" b="1" dirty="0"/>
+              <a:t>&lt;User Flow2&gt;</a:t>
+            </a:r>
+          </a:p>
+          <a:p>
+            <a:r>
+              <a:rPr lang="en-US" altLang="ko-KR" sz="1400" dirty="0"/>
+              <a:t>1. Users select a specific article via article-detail.html.</a:t>
+            </a:r>
+          </a:p>
+          <a:p>
+            <a:r>
+              <a:rPr lang="en-US" altLang="ko-KR" sz="1400" dirty="0"/>
+              <a:t>2. article-detail.js requests article data by ID from the Worker.</a:t>
+            </a:r>
+          </a:p>
+          <a:p>
+            <a:r>
+              <a:rPr lang="en-US" altLang="ko-KR" sz="1400" dirty="0"/>
+              <a:t>3. The Worker queries the D1 database and returns the article content.</a:t>
+            </a:r>
+          </a:p>
+          <a:p>
+            <a:r>
+              <a:rPr lang="en-US" altLang="ko-KR" sz="1400" dirty="0"/>
+              <a:t>4. The frontend renders the article dynamically.</a:t>
+            </a:r>
+          </a:p>
+        </p:txBody>
       </p:sp>
     </p:spTree>
   </p:cSld>

--- a/Software Architecture.pptx
+++ b/Software Architecture.pptx
@@ -455,7 +455,7 @@
           <a:p>
             <a:fld id="{C764DE79-268F-4C1A-8933-263129D2AF90}" type="datetimeFigureOut">
               <a:rPr lang="en-US" smtClean="0"/>
-              <a:t>6/1/2026</a:t>
+              <a:t>6/2/2026</a:t>
             </a:fld>
             <a:endParaRPr lang="en-US" dirty="0"/>
           </a:p>
@@ -626,7 +626,7 @@
           <a:p>
             <a:fld id="{C764DE79-268F-4C1A-8933-263129D2AF90}" type="datetimeFigureOut">
               <a:rPr lang="en-US" smtClean="0"/>
-              <a:t>6/1/2026</a:t>
+              <a:t>6/2/2026</a:t>
             </a:fld>
             <a:endParaRPr lang="en-US" dirty="0"/>
           </a:p>
@@ -807,7 +807,7 @@
           <a:p>
             <a:fld id="{C764DE79-268F-4C1A-8933-263129D2AF90}" type="datetimeFigureOut">
               <a:rPr lang="en-US" smtClean="0"/>
-              <a:t>6/1/2026</a:t>
+              <a:t>6/2/2026</a:t>
             </a:fld>
             <a:endParaRPr lang="en-US" dirty="0"/>
           </a:p>
@@ -1013,7 +1013,7 @@
           <a:p>
             <a:fld id="{C764DE79-268F-4C1A-8933-263129D2AF90}" type="datetimeFigureOut">
               <a:rPr lang="en-US" smtClean="0"/>
-              <a:t>6/1/2026</a:t>
+              <a:t>6/2/2026</a:t>
             </a:fld>
             <a:endParaRPr lang="en-US" dirty="0"/>
           </a:p>
@@ -1260,7 +1260,7 @@
           <a:p>
             <a:fld id="{C764DE79-268F-4C1A-8933-263129D2AF90}" type="datetimeFigureOut">
               <a:rPr lang="en-US" smtClean="0"/>
-              <a:t>6/1/2026</a:t>
+              <a:t>6/2/2026</a:t>
             </a:fld>
             <a:endParaRPr lang="en-US" dirty="0"/>
           </a:p>
@@ -1493,7 +1493,7 @@
           <a:p>
             <a:fld id="{C764DE79-268F-4C1A-8933-263129D2AF90}" type="datetimeFigureOut">
               <a:rPr lang="en-US" smtClean="0"/>
-              <a:t>6/1/2026</a:t>
+              <a:t>6/2/2026</a:t>
             </a:fld>
             <a:endParaRPr lang="en-US" dirty="0"/>
           </a:p>
@@ -1861,7 +1861,7 @@
           <a:p>
             <a:fld id="{C764DE79-268F-4C1A-8933-263129D2AF90}" type="datetimeFigureOut">
               <a:rPr lang="en-US" smtClean="0"/>
-              <a:t>6/1/2026</a:t>
+              <a:t>6/2/2026</a:t>
             </a:fld>
             <a:endParaRPr lang="en-US" dirty="0"/>
           </a:p>
@@ -1980,7 +1980,7 @@
           <a:p>
             <a:fld id="{C764DE79-268F-4C1A-8933-263129D2AF90}" type="datetimeFigureOut">
               <a:rPr lang="en-US" smtClean="0"/>
-              <a:t>6/1/2026</a:t>
+              <a:t>6/2/2026</a:t>
             </a:fld>
             <a:endParaRPr lang="en-US" dirty="0"/>
           </a:p>
@@ -2076,7 +2076,7 @@
           <a:p>
             <a:fld id="{C764DE79-268F-4C1A-8933-263129D2AF90}" type="datetimeFigureOut">
               <a:rPr lang="en-US" smtClean="0"/>
-              <a:t>6/1/2026</a:t>
+              <a:t>6/2/2026</a:t>
             </a:fld>
             <a:endParaRPr lang="en-US" dirty="0"/>
           </a:p>
@@ -2354,7 +2354,7 @@
           <a:p>
             <a:fld id="{C764DE79-268F-4C1A-8933-263129D2AF90}" type="datetimeFigureOut">
               <a:rPr lang="en-US" smtClean="0"/>
-              <a:t>6/1/2026</a:t>
+              <a:t>6/2/2026</a:t>
             </a:fld>
             <a:endParaRPr lang="en-US" dirty="0"/>
           </a:p>
@@ -2612,7 +2612,7 @@
           <a:p>
             <a:fld id="{C764DE79-268F-4C1A-8933-263129D2AF90}" type="datetimeFigureOut">
               <a:rPr lang="en-US" smtClean="0"/>
-              <a:t>6/1/2026</a:t>
+              <a:t>6/2/2026</a:t>
             </a:fld>
             <a:endParaRPr lang="en-US" dirty="0"/>
           </a:p>
@@ -2826,7 +2826,7 @@
           <a:p>
             <a:fld id="{C764DE79-268F-4C1A-8933-263129D2AF90}" type="datetimeFigureOut">
               <a:rPr lang="en-US" smtClean="0"/>
-              <a:t>6/1/2026</a:t>
+              <a:t>6/2/2026</a:t>
             </a:fld>
             <a:endParaRPr lang="en-US" dirty="0"/>
           </a:p>
